--- a/tools/board-reporting/sample-board-report.pptx
+++ b/tools/board-reporting/sample-board-report.pptx
@@ -4,6 +4,9 @@
   <p:sldMasterIdLst>
     <p:sldMasterId id="2147483648" r:id="rId1"/>
   </p:sldMasterIdLst>
+  <p:notesMasterIdLst>
+    <p:notesMasterId r:id="rId9"/>
+  </p:notesMasterIdLst>
   <p:sldIdLst>
     <p:sldId id="256" r:id="rId2"/>
     <p:sldId id="257" r:id="rId3"/>
@@ -13,9 +16,6 @@
     <p:sldId id="261" r:id="rId7"/>
     <p:sldId id="262" r:id="rId8"/>
   </p:sldIdLst>
-  <p:notesMasterIdLst>
-    <p:notesMasterId r:id="rId9"/>
-  </p:notesMasterIdLst>
   <p:sldSz cx="12192000" cy="6858000"/>
   <p:notesSz cx="6858000" cy="12192000"/>
   <p:defaultTextStyle>
@@ -110,6 +110,11 @@
       </a:defRPr>
     </a:lvl9pPr>
   </p:defaultTextStyle>
+  <p:extLst>
+    <p:ext uri="{EFAFB233-063F-42B5-8137-9DF3F51BA10A}">
+      <p15:sldGuideLst xmlns:p15="http://schemas.microsoft.com/office/powerpoint/2012/main"/>
+    </p:ext>
+  </p:extLst>
 </p:presentation>
 </file>
 
@@ -135,234 +140,10 @@
           <a:chExt cx="0" cy="0"/>
         </a:xfrm>
       </p:grpSpPr>
-      <p:sp>
-        <p:nvSpPr>
-          <p:cNvPr id="2" name="Header Placeholder 1"/>
-          <p:cNvSpPr>
-            <a:spLocks noGrp="1"/>
-          </p:cNvSpPr>
-          <p:nvPr>
-            <p:ph type="hdr" sz="quarter"/>
-          </p:nvPr>
-        </p:nvSpPr>
-        <p:spPr>
-          <a:xfrm>
-            <a:off x="0" y="0"/>
-            <a:ext cx="2971800" cy="458788"/>
-          </a:xfrm>
-          <a:prstGeom prst="rect">
-            <a:avLst/>
-          </a:prstGeom>
-        </p:spPr>
-        <p:txBody>
-          <a:bodyPr vert="horz" lIns="91440" tIns="45720" rIns="91440" bIns="45720" rtlCol="0"/>
-          <a:lstStyle>
-            <a:lvl1pPr algn="l">
-              <a:defRPr sz="1200"/>
-            </a:lvl1pPr>
-          </a:lstStyle>
-          <a:p>
-            <a:endParaRPr lang="en-US"/>
-          </a:p>
-        </p:txBody>
-      </p:sp>
-      <p:sp>
-        <p:nvSpPr>
-          <p:cNvPr id="3" name="Date Placeholder 2"/>
-          <p:cNvSpPr>
-            <a:spLocks noGrp="1"/>
-          </p:cNvSpPr>
-          <p:nvPr>
-            <p:ph type="dt" idx="1"/>
-          </p:nvPr>
-        </p:nvSpPr>
-        <p:spPr>
-          <a:xfrm>
-            <a:off x="3884613" y="0"/>
-            <a:ext cx="2971800" cy="458788"/>
-          </a:xfrm>
-          <a:prstGeom prst="rect">
-            <a:avLst/>
-          </a:prstGeom>
-        </p:spPr>
-        <p:txBody>
-          <a:bodyPr vert="horz" lIns="91440" tIns="45720" rIns="91440" bIns="45720" rtlCol="0"/>
-          <a:lstStyle>
-            <a:lvl1pPr algn="r">
-              <a:defRPr sz="1200"/>
-            </a:lvl1pPr>
-          </a:lstStyle>
-          <a:p>
-            <a:fld id="{5282F153-3F37-0F45-9E97-73ACFA13230C}" type="datetimeFigureOut">
-              <a:rPr lang="en-US"/>
-              <a:t>7/23/19</a:t>
-            </a:fld>
-            <a:endParaRPr lang="en-US"/>
-          </a:p>
-        </p:txBody>
-      </p:sp>
-      <p:sp>
-        <p:nvSpPr>
-          <p:cNvPr id="4" name="Slide Image Placeholder 3"/>
-          <p:cNvSpPr>
-            <a:spLocks noGrp="1" noRot="1" noChangeAspect="1"/>
-          </p:cNvSpPr>
-          <p:nvPr>
-            <p:ph type="sldImg" idx="2"/>
-          </p:nvPr>
-        </p:nvSpPr>
-        <p:spPr>
-          <a:xfrm>
-            <a:off x="685800" y="1143000"/>
-            <a:ext cx="5486400" cy="3086100"/>
-          </a:xfrm>
-          <a:prstGeom prst="rect">
-            <a:avLst/>
-          </a:prstGeom>
-          <a:noFill/>
-          <a:ln w="12700">
-            <a:solidFill>
-              <a:prstClr val="black"/>
-            </a:solidFill>
-          </a:ln>
-        </p:spPr>
-        <p:txBody>
-          <a:bodyPr vert="horz" lIns="91440" tIns="45720" rIns="91440" bIns="45720" rtlCol="0" anchor="ctr"/>
-          <a:lstStyle/>
-          <a:p>
-            <a:endParaRPr lang="en-US"/>
-          </a:p>
-        </p:txBody>
-      </p:sp>
-      <p:sp>
-        <p:nvSpPr>
-          <p:cNvPr id="5" name="Notes Placeholder 4"/>
-          <p:cNvSpPr>
-            <a:spLocks noGrp="1"/>
-          </p:cNvSpPr>
-          <p:nvPr>
-            <p:ph type="body" sz="quarter" idx="3"/>
-          </p:nvPr>
-        </p:nvSpPr>
-        <p:spPr>
-          <a:xfrm>
-            <a:off x="685800" y="4400550"/>
-            <a:ext cx="5486400" cy="3600450"/>
-          </a:xfrm>
-          <a:prstGeom prst="rect">
-            <a:avLst/>
-          </a:prstGeom>
-        </p:spPr>
-        <p:txBody>
-          <a:bodyPr vert="horz" lIns="91440" tIns="45720" rIns="91440" bIns="45720" rtlCol="0"/>
-          <a:lstStyle/>
-          <a:p>
-            <a:pPr lvl="0"/>
-            <a:r>
-              <a:rPr lang="en-US"/>
-              <a:t>Click to edit Master text styles</a:t>
-            </a:r>
-          </a:p>
-          <a:p>
-            <a:pPr lvl="1"/>
-            <a:r>
-              <a:rPr lang="en-US"/>
-              <a:t>Second level</a:t>
-            </a:r>
-          </a:p>
-          <a:p>
-            <a:pPr lvl="2"/>
-            <a:r>
-              <a:rPr lang="en-US"/>
-              <a:t>Third level</a:t>
-            </a:r>
-          </a:p>
-          <a:p>
-            <a:pPr lvl="3"/>
-            <a:r>
-              <a:rPr lang="en-US"/>
-              <a:t>Fourth level</a:t>
-            </a:r>
-          </a:p>
-          <a:p>
-            <a:pPr lvl="4"/>
-            <a:r>
-              <a:rPr lang="en-US"/>
-              <a:t>Fifth level</a:t>
-            </a:r>
-          </a:p>
-        </p:txBody>
-      </p:sp>
-      <p:sp>
-        <p:nvSpPr>
-          <p:cNvPr id="6" name="Footer Placeholder 5"/>
-          <p:cNvSpPr>
-            <a:spLocks noGrp="1"/>
-          </p:cNvSpPr>
-          <p:nvPr>
-            <p:ph type="ftr" sz="quarter" idx="4"/>
-          </p:nvPr>
-        </p:nvSpPr>
-        <p:spPr>
-          <a:xfrm>
-            <a:off x="0" y="8685213"/>
-            <a:ext cx="2971800" cy="458787"/>
-          </a:xfrm>
-          <a:prstGeom prst="rect">
-            <a:avLst/>
-          </a:prstGeom>
-        </p:spPr>
-        <p:txBody>
-          <a:bodyPr vert="horz" lIns="91440" tIns="45720" rIns="91440" bIns="45720" rtlCol="0" anchor="b"/>
-          <a:lstStyle>
-            <a:lvl1pPr algn="l">
-              <a:defRPr sz="1200"/>
-            </a:lvl1pPr>
-          </a:lstStyle>
-          <a:p>
-            <a:endParaRPr lang="en-US"/>
-          </a:p>
-        </p:txBody>
-      </p:sp>
-      <p:sp>
-        <p:nvSpPr>
-          <p:cNvPr id="7" name="Slide Number Placeholder 6"/>
-          <p:cNvSpPr>
-            <a:spLocks noGrp="1"/>
-          </p:cNvSpPr>
-          <p:nvPr>
-            <p:ph type="sldNum" sz="quarter" idx="5"/>
-          </p:nvPr>
-        </p:nvSpPr>
-        <p:spPr>
-          <a:xfrm>
-            <a:off x="3884613" y="8685213"/>
-            <a:ext cx="2971800" cy="458787"/>
-          </a:xfrm>
-          <a:prstGeom prst="rect">
-            <a:avLst/>
-          </a:prstGeom>
-        </p:spPr>
-        <p:txBody>
-          <a:bodyPr vert="horz" lIns="91440" tIns="45720" rIns="91440" bIns="45720" rtlCol="0" anchor="b"/>
-          <a:lstStyle>
-            <a:lvl1pPr algn="r">
-              <a:defRPr sz="1200"/>
-            </a:lvl1pPr>
-          </a:lstStyle>
-          <a:p>
-            <a:fld id="{CE5E9CC1-C706-0F49-92D6-E571CC5EEA8F}" type="slidenum">
-              <a:rPr lang="en-US"/>
-              <a:t>‹#›</a:t>
-            </a:fld>
-            <a:endParaRPr lang="en-US"/>
-          </a:p>
-        </p:txBody>
-      </p:sp>
     </p:spTree>
     <p:extLst>
       <p:ext uri="{BB962C8B-B14F-4D97-AF65-F5344CB8AC3E}">
-        <p14:creationId xmlns:p14="http://schemas.microsoft.com/office/powerpoint/2010/main" val="1024086991"/>
+        <p14:creationId xmlns:p14="http://schemas.microsoft.com/office/powerpoint/2010/main" val="3054120743"/>
       </p:ext>
     </p:extLst>
   </p:cSld>
@@ -506,10 +287,6 @@
           <a:bodyPr/>
           <a:lstStyle/>
           <a:p>
-            <a:r>
-              <a:rPr lang="en-US" dirty="0"/>
-              <a:t/>
-            </a:r>
             <a:endParaRPr lang="en-US" dirty="0"/>
           </a:p>
         </p:txBody>
@@ -594,10 +371,6 @@
           <a:bodyPr/>
           <a:lstStyle/>
           <a:p>
-            <a:r>
-              <a:rPr lang="en-US" dirty="0"/>
-              <a:t/>
-            </a:r>
             <a:endParaRPr lang="en-US" dirty="0"/>
           </a:p>
         </p:txBody>
@@ -682,10 +455,6 @@
           <a:bodyPr/>
           <a:lstStyle/>
           <a:p>
-            <a:r>
-              <a:rPr lang="en-US" dirty="0"/>
-              <a:t/>
-            </a:r>
             <a:endParaRPr lang="en-US" dirty="0"/>
           </a:p>
         </p:txBody>
@@ -770,10 +539,6 @@
           <a:bodyPr/>
           <a:lstStyle/>
           <a:p>
-            <a:r>
-              <a:rPr lang="en-US" dirty="0"/>
-              <a:t/>
-            </a:r>
             <a:endParaRPr lang="en-US" dirty="0"/>
           </a:p>
         </p:txBody>
@@ -858,10 +623,6 @@
           <a:bodyPr/>
           <a:lstStyle/>
           <a:p>
-            <a:r>
-              <a:rPr lang="en-US" dirty="0"/>
-              <a:t/>
-            </a:r>
             <a:endParaRPr lang="en-US" dirty="0"/>
           </a:p>
         </p:txBody>
@@ -946,10 +707,6 @@
           <a:bodyPr/>
           <a:lstStyle/>
           <a:p>
-            <a:r>
-              <a:rPr lang="en-US" dirty="0"/>
-              <a:t/>
-            </a:r>
             <a:endParaRPr lang="en-US" dirty="0"/>
           </a:p>
         </p:txBody>
@@ -1034,10 +791,6 @@
           <a:bodyPr/>
           <a:lstStyle/>
           <a:p>
-            <a:r>
-              <a:rPr lang="en-US" dirty="0"/>
-              <a:t/>
-            </a:r>
             <a:endParaRPr lang="en-US" dirty="0"/>
           </a:p>
         </p:txBody>
@@ -1111,6 +864,11 @@
 <file path=ppt/slideMasters/slideMaster1.xml><?xml version="1.0" encoding="utf-8"?>
 <p:sldMaster xmlns:a="http://schemas.openxmlformats.org/drawingml/2006/main" xmlns:r="http://schemas.openxmlformats.org/officeDocument/2006/relationships" xmlns:p="http://schemas.openxmlformats.org/presentationml/2006/main">
   <p:cSld>
+    <p:bg>
+      <p:bgRef idx="1001">
+        <a:schemeClr val="bg1"/>
+      </p:bgRef>
+    </p:bg>
     <p:spTree>
       <p:nvGrpSpPr>
         <p:cNvPr id="1" name=""/>
@@ -1393,6 +1151,7 @@
         <a:solidFill>
           <a:srgbClr val="FFFFFF"/>
         </a:solidFill>
+        <a:effectLst/>
       </p:bgPr>
     </p:bg>
     <p:spTree>
@@ -1430,7 +1189,7 @@
           <a:bodyPr wrap="square" lIns="0" tIns="0" rIns="0" bIns="0" rtlCol="0" anchor="ctr"/>
           <a:lstStyle/>
           <a:p>
-            <a:pPr indent="0" marL="0">
+            <a:pPr marL="0" indent="0">
               <a:buNone/>
             </a:pPr>
             <a:r>
@@ -1469,7 +1228,7 @@
           <a:bodyPr wrap="square" lIns="0" tIns="0" rIns="0" bIns="0" rtlCol="0" anchor="ctr"/>
           <a:lstStyle/>
           <a:p>
-            <a:pPr indent="0" marL="0">
+            <a:pPr marL="0" indent="0">
               <a:buNone/>
             </a:pPr>
             <a:r>
@@ -1509,6 +1268,13 @@
             <a:prstDash val="solid"/>
           </a:ln>
         </p:spPr>
+        <p:txBody>
+          <a:bodyPr/>
+          <a:lstStyle/>
+          <a:p>
+            <a:endParaRPr lang="en-US"/>
+          </a:p>
+        </p:txBody>
       </p:sp>
       <p:sp>
         <p:nvSpPr>
@@ -1531,7 +1297,7 @@
           <a:bodyPr wrap="square" lIns="0" tIns="0" rIns="0" bIns="0" rtlCol="0" anchor="ctr"/>
           <a:lstStyle/>
           <a:p>
-            <a:pPr indent="0" marL="0">
+            <a:pPr marL="0" indent="0">
               <a:buNone/>
             </a:pPr>
             <a:r>
@@ -1565,6 +1331,7 @@
         <a:solidFill>
           <a:srgbClr val="FFFFFF"/>
         </a:solidFill>
+        <a:effectLst/>
       </p:bgPr>
     </p:bg>
     <p:spTree>
@@ -1600,17 +1367,24 @@
           </a:solidFill>
           <a:ln/>
         </p:spPr>
+        <p:txBody>
+          <a:bodyPr/>
+          <a:lstStyle/>
+          <a:p>
+            <a:endParaRPr lang="en-US"/>
+          </a:p>
+        </p:txBody>
       </p:sp>
       <p:pic>
         <p:nvPicPr>
-          <p:cNvPr id="3" name="Image 0" descr="preencoded.png">    </p:cNvPr>
+          <p:cNvPr id="3" name="Image 0" descr="preencoded.png"/>
           <p:cNvPicPr>
             <a:picLocks noChangeAspect="1"/>
           </p:cNvPicPr>
           <p:nvPr/>
         </p:nvPicPr>
         <p:blipFill>
-          <a:blip r:embed="rId1"/>
+          <a:blip r:embed="rId3"/>
           <a:stretch>
             <a:fillRect/>
           </a:stretch>
@@ -1646,7 +1420,7 @@
           <a:bodyPr wrap="square" lIns="0" tIns="0" rIns="0" bIns="0" rtlCol="0" anchor="ctr"/>
           <a:lstStyle/>
           <a:p>
-            <a:pPr indent="0" marL="0">
+            <a:pPr marL="0" indent="0">
               <a:buNone/>
             </a:pPr>
             <a:r>
@@ -1690,6 +1464,13 @@
             <a:prstDash val="solid"/>
           </a:ln>
         </p:spPr>
+        <p:txBody>
+          <a:bodyPr/>
+          <a:lstStyle/>
+          <a:p>
+            <a:endParaRPr lang="en-US"/>
+          </a:p>
+        </p:txBody>
       </p:sp>
       <p:sp>
         <p:nvSpPr>
@@ -1712,7 +1493,7 @@
           <a:bodyPr wrap="square" lIns="0" tIns="0" rIns="0" bIns="0" rtlCol="0" anchor="ctr"/>
           <a:lstStyle/>
           <a:p>
-            <a:pPr indent="0" marL="0">
+            <a:pPr marL="0" indent="0">
               <a:buNone/>
             </a:pPr>
             <a:r>
@@ -1751,7 +1532,7 @@
           <a:bodyPr wrap="square" lIns="0" tIns="0" rIns="0" bIns="0" rtlCol="0" anchor="ctr"/>
           <a:lstStyle/>
           <a:p>
-            <a:pPr indent="0" marL="0">
+            <a:pPr marL="0" indent="0">
               <a:buNone/>
             </a:pPr>
             <a:r>
@@ -1790,7 +1571,7 @@
           <a:bodyPr wrap="square" lIns="0" tIns="0" rIns="0" bIns="0" rtlCol="0" anchor="ctr"/>
           <a:lstStyle/>
           <a:p>
-            <a:pPr indent="0" marL="0">
+            <a:pPr marL="0" indent="0">
               <a:buNone/>
             </a:pPr>
             <a:r>
@@ -1834,6 +1615,13 @@
             <a:prstDash val="solid"/>
           </a:ln>
         </p:spPr>
+        <p:txBody>
+          <a:bodyPr/>
+          <a:lstStyle/>
+          <a:p>
+            <a:endParaRPr lang="en-US"/>
+          </a:p>
+        </p:txBody>
       </p:sp>
       <p:sp>
         <p:nvSpPr>
@@ -1856,7 +1644,7 @@
           <a:bodyPr wrap="square" lIns="0" tIns="0" rIns="0" bIns="0" rtlCol="0" anchor="ctr"/>
           <a:lstStyle/>
           <a:p>
-            <a:pPr indent="0" marL="0">
+            <a:pPr marL="0" indent="0">
               <a:buNone/>
             </a:pPr>
             <a:r>
@@ -1895,7 +1683,7 @@
           <a:bodyPr wrap="square" lIns="0" tIns="0" rIns="0" bIns="0" rtlCol="0" anchor="ctr"/>
           <a:lstStyle/>
           <a:p>
-            <a:pPr indent="0" marL="0">
+            <a:pPr marL="0" indent="0">
               <a:buNone/>
             </a:pPr>
             <a:r>
@@ -1934,7 +1722,7 @@
           <a:bodyPr wrap="square" lIns="0" tIns="0" rIns="0" bIns="0" rtlCol="0" anchor="ctr"/>
           <a:lstStyle/>
           <a:p>
-            <a:pPr indent="0" marL="0">
+            <a:pPr marL="0" indent="0">
               <a:buNone/>
             </a:pPr>
             <a:r>
@@ -1978,6 +1766,13 @@
             <a:prstDash val="solid"/>
           </a:ln>
         </p:spPr>
+        <p:txBody>
+          <a:bodyPr/>
+          <a:lstStyle/>
+          <a:p>
+            <a:endParaRPr lang="en-US"/>
+          </a:p>
+        </p:txBody>
       </p:sp>
       <p:sp>
         <p:nvSpPr>
@@ -2000,7 +1795,7 @@
           <a:bodyPr wrap="square" lIns="0" tIns="0" rIns="0" bIns="0" rtlCol="0" anchor="ctr"/>
           <a:lstStyle/>
           <a:p>
-            <a:pPr indent="0" marL="0">
+            <a:pPr marL="0" indent="0">
               <a:buNone/>
             </a:pPr>
             <a:r>
@@ -2039,7 +1834,7 @@
           <a:bodyPr wrap="square" lIns="0" tIns="0" rIns="0" bIns="0" rtlCol="0" anchor="ctr"/>
           <a:lstStyle/>
           <a:p>
-            <a:pPr indent="0" marL="0">
+            <a:pPr marL="0" indent="0">
               <a:buNone/>
             </a:pPr>
             <a:r>
@@ -2078,7 +1873,7 @@
           <a:bodyPr wrap="square" lIns="0" tIns="0" rIns="0" bIns="0" rtlCol="0" anchor="ctr"/>
           <a:lstStyle/>
           <a:p>
-            <a:pPr indent="0" marL="0">
+            <a:pPr marL="0" indent="0">
               <a:buNone/>
             </a:pPr>
             <a:r>
@@ -2122,6 +1917,13 @@
             <a:prstDash val="solid"/>
           </a:ln>
         </p:spPr>
+        <p:txBody>
+          <a:bodyPr/>
+          <a:lstStyle/>
+          <a:p>
+            <a:endParaRPr lang="en-US"/>
+          </a:p>
+        </p:txBody>
       </p:sp>
       <p:sp>
         <p:nvSpPr>
@@ -2144,7 +1946,7 @@
           <a:bodyPr wrap="square" lIns="0" tIns="0" rIns="0" bIns="0" rtlCol="0" anchor="ctr"/>
           <a:lstStyle/>
           <a:p>
-            <a:pPr indent="0" marL="0">
+            <a:pPr marL="0" indent="0">
               <a:buNone/>
             </a:pPr>
             <a:r>
@@ -2183,7 +1985,7 @@
           <a:bodyPr wrap="square" lIns="0" tIns="0" rIns="0" bIns="0" rtlCol="0" anchor="ctr"/>
           <a:lstStyle/>
           <a:p>
-            <a:pPr indent="0" marL="0">
+            <a:pPr marL="0" indent="0">
               <a:buNone/>
             </a:pPr>
             <a:r>
@@ -2222,7 +2024,7 @@
           <a:bodyPr wrap="square" lIns="0" tIns="0" rIns="0" bIns="0" rtlCol="0" anchor="ctr"/>
           <a:lstStyle/>
           <a:p>
-            <a:pPr indent="0" marL="0">
+            <a:pPr marL="0" indent="0">
               <a:buNone/>
             </a:pPr>
             <a:r>
@@ -2266,6 +2068,13 @@
             <a:prstDash val="solid"/>
           </a:ln>
         </p:spPr>
+        <p:txBody>
+          <a:bodyPr/>
+          <a:lstStyle/>
+          <a:p>
+            <a:endParaRPr lang="en-US"/>
+          </a:p>
+        </p:txBody>
       </p:sp>
       <p:sp>
         <p:nvSpPr>
@@ -2288,7 +2097,7 @@
           <a:bodyPr wrap="square" lIns="0" tIns="0" rIns="0" bIns="0" rtlCol="0" anchor="ctr"/>
           <a:lstStyle/>
           <a:p>
-            <a:pPr indent="0" marL="0">
+            <a:pPr marL="0" indent="0">
               <a:buNone/>
             </a:pPr>
             <a:r>
@@ -2327,7 +2136,7 @@
           <a:bodyPr wrap="square" lIns="0" tIns="0" rIns="0" bIns="0" rtlCol="0" anchor="ctr"/>
           <a:lstStyle/>
           <a:p>
-            <a:pPr indent="0" marL="0">
+            <a:pPr marL="0" indent="0">
               <a:buNone/>
             </a:pPr>
             <a:r>
@@ -2366,7 +2175,7 @@
           <a:bodyPr wrap="square" lIns="0" tIns="0" rIns="0" bIns="0" rtlCol="0" anchor="ctr"/>
           <a:lstStyle/>
           <a:p>
-            <a:pPr indent="0" marL="0">
+            <a:pPr marL="0" indent="0">
               <a:buNone/>
             </a:pPr>
             <a:r>
@@ -2405,7 +2214,7 @@
           <a:bodyPr wrap="square" lIns="0" tIns="0" rIns="0" bIns="0" rtlCol="0" anchor="ctr"/>
           <a:lstStyle/>
           <a:p>
-            <a:pPr algn="r" indent="0" marL="0">
+            <a:pPr marL="0" indent="0" algn="r">
               <a:buNone/>
             </a:pPr>
             <a:r>
@@ -2439,6 +2248,7 @@
         <a:solidFill>
           <a:srgbClr val="FFFFFF"/>
         </a:solidFill>
+        <a:effectLst/>
       </p:bgPr>
     </p:bg>
     <p:spTree>
@@ -2474,254 +2284,17 @@
           </a:solidFill>
           <a:ln/>
         </p:spPr>
+        <p:txBody>
+          <a:bodyPr/>
+          <a:lstStyle/>
+          <a:p>
+            <a:endParaRPr lang="en-US"/>
+          </a:p>
+        </p:txBody>
       </p:sp>
       <p:pic>
         <p:nvPicPr>
-          <p:cNvPr id="3" name="Image 0" descr="preencoded.png">    </p:cNvPr>
-          <p:cNvPicPr>
-            <a:picLocks noChangeAspect="1"/>
-          </p:cNvPicPr>
-          <p:nvPr/>
-        </p:nvPicPr>
-        <p:blipFill>
-          <a:blip r:embed="rId1"/>
-          <a:stretch>
-            <a:fillRect/>
-          </a:stretch>
-        </p:blipFill>
-        <p:spPr>
-          <a:xfrm>
-            <a:off x="602407" y="510967"/>
-            <a:ext cx="276515" cy="276515"/>
-          </a:xfrm>
-          <a:prstGeom prst="rect">
-            <a:avLst/>
-          </a:prstGeom>
-        </p:spPr>
-      </p:pic>
-      <p:sp>
-        <p:nvSpPr>
-          <p:cNvPr id="4" name="Text 1"/>
-          <p:cNvSpPr txBox="1"/>
-          <p:nvPr/>
-        </p:nvSpPr>
-        <p:spPr>
-          <a:xfrm>
-            <a:off x="1051560" y="429768"/>
-            <a:ext cx="7315200" cy="438912"/>
-          </a:xfrm>
-          <a:prstGeom prst="rect">
-            <a:avLst/>
-          </a:prstGeom>
-          <a:noFill/>
-          <a:ln/>
-        </p:spPr>
-        <p:txBody>
-          <a:bodyPr wrap="square" lIns="0" tIns="0" rIns="0" bIns="0" rtlCol="0" anchor="ctr"/>
-          <a:lstStyle/>
-          <a:p>
-            <a:pPr indent="0" marL="0">
-              <a:buNone/>
-            </a:pPr>
-            <a:r>
-              <a:rPr lang="en-US" sz="2000" b="1" dirty="0">
-                <a:solidFill>
-                  <a:srgbClr val="22252B"/>
-                </a:solidFill>
-                <a:latin typeface="Calibri" pitchFamily="34" charset="0"/>
-                <a:ea typeface="Calibri" pitchFamily="34" charset="-122"/>
-                <a:cs typeface="Calibri" pitchFamily="34" charset="-120"/>
-              </a:rPr>
-              <a:t>Business Outcomes This Quarter</a:t>
-            </a:r>
-            <a:endParaRPr lang="en-US" sz="2000" dirty="0"/>
-          </a:p>
-        </p:txBody>
-      </p:sp>
-      <p:sp>
-        <p:nvSpPr>
-          <p:cNvPr id="5" name="Text 2"/>
-          <p:cNvSpPr txBox="1"/>
-          <p:nvPr/>
-        </p:nvSpPr>
-        <p:spPr>
-          <a:xfrm>
-            <a:off x="548640" y="868680"/>
-            <a:ext cx="10058400" cy="320040"/>
-          </a:xfrm>
-          <a:prstGeom prst="rect">
-            <a:avLst/>
-          </a:prstGeom>
-          <a:noFill/>
-          <a:ln/>
-        </p:spPr>
-        <p:txBody>
-          <a:bodyPr wrap="square" lIns="0" tIns="0" rIns="0" bIns="0" rtlCol="0" anchor="ctr"/>
-          <a:lstStyle/>
-          <a:p>
-            <a:pPr indent="0" marL="0">
-              <a:buNone/>
-            </a:pPr>
-            <a:r>
-              <a:rPr lang="en-US" sz="1200" i="1" dirty="0">
-                <a:solidFill>
-                  <a:srgbClr val="5A5F6B"/>
-                </a:solidFill>
-                <a:latin typeface="Calibri" pitchFamily="34" charset="0"/>
-                <a:ea typeface="Calibri" pitchFamily="34" charset="-122"/>
-                <a:cs typeface="Calibri" pitchFamily="34" charset="-120"/>
-              </a:rPr>
-              <a:t>What changed for the business, not what shipped internally.</a:t>
-            </a:r>
-            <a:endParaRPr lang="en-US" sz="1200" dirty="0"/>
-          </a:p>
-        </p:txBody>
-      </p:sp>
-      <p:sp>
-        <p:nvSpPr>
-          <p:cNvPr id="6" name="Shape 3"/>
-          <p:cNvSpPr/>
-          <p:nvPr/>
-        </p:nvSpPr>
-        <p:spPr>
-          <a:xfrm>
-            <a:off x="548640" y="1417320"/>
-            <a:ext cx="457200" cy="457200"/>
-          </a:xfrm>
-          <a:prstGeom prst="ellipse">
-            <a:avLst/>
-          </a:prstGeom>
-          <a:solidFill>
-            <a:srgbClr val="1E2761"/>
-          </a:solidFill>
-          <a:ln/>
-        </p:spPr>
-      </p:sp>
-      <p:pic>
-        <p:nvPicPr>
-          <p:cNvPr id="7" name="Image 1" descr="preencoded.png">    </p:cNvPr>
-          <p:cNvPicPr>
-            <a:picLocks noChangeAspect="1"/>
-          </p:cNvPicPr>
-          <p:nvPr/>
-        </p:nvPicPr>
-        <p:blipFill>
-          <a:blip r:embed="rId2"/>
-          <a:stretch>
-            <a:fillRect/>
-          </a:stretch>
-        </p:blipFill>
-        <p:spPr>
-          <a:xfrm>
-            <a:off x="612648" y="1481328"/>
-            <a:ext cx="329184" cy="329184"/>
-          </a:xfrm>
-          <a:prstGeom prst="rect">
-            <a:avLst/>
-          </a:prstGeom>
-        </p:spPr>
-      </p:pic>
-      <p:sp>
-        <p:nvSpPr>
-          <p:cNvPr id="8" name="Text 4"/>
-          <p:cNvSpPr txBox="1"/>
-          <p:nvPr/>
-        </p:nvSpPr>
-        <p:spPr>
-          <a:xfrm>
-            <a:off x="1188720" y="1389888"/>
-            <a:ext cx="10241280" cy="457200"/>
-          </a:xfrm>
-          <a:prstGeom prst="rect">
-            <a:avLst/>
-          </a:prstGeom>
-          <a:noFill/>
-          <a:ln/>
-        </p:spPr>
-        <p:txBody>
-          <a:bodyPr wrap="square" lIns="0" tIns="0" rIns="0" bIns="0" rtlCol="0" anchor="ctr"/>
-          <a:lstStyle/>
-          <a:p>
-            <a:pPr indent="0" marL="0">
-              <a:buNone/>
-            </a:pPr>
-            <a:r>
-              <a:rPr lang="en-US" sz="1600" b="1" dirty="0">
-                <a:solidFill>
-                  <a:srgbClr val="22252B"/>
-                </a:solidFill>
-                <a:latin typeface="Calibri" pitchFamily="34" charset="0"/>
-                <a:ea typeface="Calibri" pitchFamily="34" charset="-122"/>
-                <a:cs typeface="Calibri" pitchFamily="34" charset="-120"/>
-              </a:rPr>
-              <a:t>Customer onboarding time cut from 5 weeks to 12 days</a:t>
-            </a:r>
-            <a:endParaRPr lang="en-US" sz="1600" dirty="0"/>
-          </a:p>
-        </p:txBody>
-      </p:sp>
-      <p:sp>
-        <p:nvSpPr>
-          <p:cNvPr id="9" name="Text 5"/>
-          <p:cNvSpPr txBox="1"/>
-          <p:nvPr/>
-        </p:nvSpPr>
-        <p:spPr>
-          <a:xfrm>
-            <a:off x="1188720" y="1874520"/>
-            <a:ext cx="10241280" cy="502920"/>
-          </a:xfrm>
-          <a:prstGeom prst="rect">
-            <a:avLst/>
-          </a:prstGeom>
-          <a:noFill/>
-          <a:ln/>
-        </p:spPr>
-        <p:txBody>
-          <a:bodyPr wrap="square" lIns="0" tIns="0" rIns="0" bIns="0" rtlCol="0" anchor="ctr"/>
-          <a:lstStyle/>
-          <a:p>
-            <a:pPr indent="0" marL="0">
-              <a:buNone/>
-            </a:pPr>
-            <a:r>
-              <a:rPr lang="en-US" sz="1250" dirty="0">
-                <a:solidFill>
-                  <a:srgbClr val="5A5F6B"/>
-                </a:solidFill>
-                <a:latin typeface="Calibri" pitchFamily="34" charset="0"/>
-                <a:ea typeface="Calibri" pitchFamily="34" charset="-122"/>
-                <a:cs typeface="Calibri" pitchFamily="34" charset="-120"/>
-              </a:rPr>
-              <a:t>Early data shows a meaningful lift in trial-to-paid conversion; full quarter attribution in progress.</a:t>
-            </a:r>
-            <a:endParaRPr lang="en-US" sz="1250" dirty="0"/>
-          </a:p>
-        </p:txBody>
-      </p:sp>
-      <p:sp>
-        <p:nvSpPr>
-          <p:cNvPr id="10" name="Shape 6"/>
-          <p:cNvSpPr/>
-          <p:nvPr/>
-        </p:nvSpPr>
-        <p:spPr>
-          <a:xfrm>
-            <a:off x="548640" y="2834640"/>
-            <a:ext cx="457200" cy="457200"/>
-          </a:xfrm>
-          <a:prstGeom prst="ellipse">
-            <a:avLst/>
-          </a:prstGeom>
-          <a:solidFill>
-            <a:srgbClr val="1E2761"/>
-          </a:solidFill>
-          <a:ln/>
-        </p:spPr>
-      </p:sp>
-      <p:pic>
-        <p:nvPicPr>
-          <p:cNvPr id="11" name="Image 2" descr="preencoded.png">    </p:cNvPr>
+          <p:cNvPr id="3" name="Image 0" descr="preencoded.png"/>
           <p:cNvPicPr>
             <a:picLocks noChangeAspect="1"/>
           </p:cNvPicPr>
@@ -2735,8 +2308,8 @@
         </p:blipFill>
         <p:spPr>
           <a:xfrm>
-            <a:off x="612648" y="2898648"/>
-            <a:ext cx="329184" cy="329184"/>
+            <a:off x="602407" y="510967"/>
+            <a:ext cx="276515" cy="276515"/>
           </a:xfrm>
           <a:prstGeom prst="rect">
             <a:avLst/>
@@ -2745,30 +2318,30 @@
       </p:pic>
       <p:sp>
         <p:nvSpPr>
-          <p:cNvPr id="12" name="Text 7"/>
-          <p:cNvSpPr txBox="1"/>
-          <p:nvPr/>
-        </p:nvSpPr>
-        <p:spPr>
-          <a:xfrm>
-            <a:off x="1188720" y="2807208"/>
-            <a:ext cx="10241280" cy="457200"/>
-          </a:xfrm>
-          <a:prstGeom prst="rect">
-            <a:avLst/>
-          </a:prstGeom>
-          <a:noFill/>
-          <a:ln/>
-        </p:spPr>
-        <p:txBody>
-          <a:bodyPr wrap="square" lIns="0" tIns="0" rIns="0" bIns="0" rtlCol="0" anchor="ctr"/>
-          <a:lstStyle/>
-          <a:p>
-            <a:pPr indent="0" marL="0">
-              <a:buNone/>
-            </a:pPr>
-            <a:r>
-              <a:rPr lang="en-US" sz="1600" b="1" dirty="0">
+          <p:cNvPr id="4" name="Text 1"/>
+          <p:cNvSpPr txBox="1"/>
+          <p:nvPr/>
+        </p:nvSpPr>
+        <p:spPr>
+          <a:xfrm>
+            <a:off x="1051560" y="429768"/>
+            <a:ext cx="7315200" cy="438912"/>
+          </a:xfrm>
+          <a:prstGeom prst="rect">
+            <a:avLst/>
+          </a:prstGeom>
+          <a:noFill/>
+          <a:ln/>
+        </p:spPr>
+        <p:txBody>
+          <a:bodyPr wrap="square" lIns="0" tIns="0" rIns="0" bIns="0" rtlCol="0" anchor="ctr"/>
+          <a:lstStyle/>
+          <a:p>
+            <a:pPr marL="0" indent="0">
+              <a:buNone/>
+            </a:pPr>
+            <a:r>
+              <a:rPr lang="en-US" sz="2000" b="1" dirty="0">
                 <a:solidFill>
                   <a:srgbClr val="22252B"/>
                 </a:solidFill>
@@ -2776,38 +2349,38 @@
                 <a:ea typeface="Calibri" pitchFamily="34" charset="-122"/>
                 <a:cs typeface="Calibri" pitchFamily="34" charset="-120"/>
               </a:rPr>
-              <a:t>Self-serve pricing tier launched</a:t>
-            </a:r>
-            <a:endParaRPr lang="en-US" sz="1600" dirty="0"/>
-          </a:p>
-        </p:txBody>
-      </p:sp>
-      <p:sp>
-        <p:nvSpPr>
-          <p:cNvPr id="13" name="Text 8"/>
-          <p:cNvSpPr txBox="1"/>
-          <p:nvPr/>
-        </p:nvSpPr>
-        <p:spPr>
-          <a:xfrm>
-            <a:off x="1188720" y="3291840"/>
-            <a:ext cx="10241280" cy="502920"/>
-          </a:xfrm>
-          <a:prstGeom prst="rect">
-            <a:avLst/>
-          </a:prstGeom>
-          <a:noFill/>
-          <a:ln/>
-        </p:spPr>
-        <p:txBody>
-          <a:bodyPr wrap="square" lIns="0" tIns="0" rIns="0" bIns="0" rtlCol="0" anchor="ctr"/>
-          <a:lstStyle/>
-          <a:p>
-            <a:pPr indent="0" marL="0">
-              <a:buNone/>
-            </a:pPr>
-            <a:r>
-              <a:rPr lang="en-US" sz="1250" dirty="0">
+              <a:t>Business Outcomes This Quarter</a:t>
+            </a:r>
+            <a:endParaRPr lang="en-US" sz="2000" dirty="0"/>
+          </a:p>
+        </p:txBody>
+      </p:sp>
+      <p:sp>
+        <p:nvSpPr>
+          <p:cNvPr id="5" name="Text 2"/>
+          <p:cNvSpPr txBox="1"/>
+          <p:nvPr/>
+        </p:nvSpPr>
+        <p:spPr>
+          <a:xfrm>
+            <a:off x="548640" y="868680"/>
+            <a:ext cx="10058400" cy="320040"/>
+          </a:xfrm>
+          <a:prstGeom prst="rect">
+            <a:avLst/>
+          </a:prstGeom>
+          <a:noFill/>
+          <a:ln/>
+        </p:spPr>
+        <p:txBody>
+          <a:bodyPr wrap="square" lIns="0" tIns="0" rIns="0" bIns="0" rtlCol="0" anchor="ctr"/>
+          <a:lstStyle/>
+          <a:p>
+            <a:pPr marL="0" indent="0">
+              <a:buNone/>
+            </a:pPr>
+            <a:r>
+              <a:rPr lang="en-US" sz="1200" i="1" dirty="0">
                 <a:solidFill>
                   <a:srgbClr val="5A5F6B"/>
                 </a:solidFill>
@@ -2815,21 +2388,21 @@
                 <a:ea typeface="Calibri" pitchFamily="34" charset="-122"/>
                 <a:cs typeface="Calibri" pitchFamily="34" charset="-120"/>
               </a:rPr>
-              <a:t>Opens a segment previously requiring a sales-assisted deal; first full quarter of bookings next update.</a:t>
-            </a:r>
-            <a:endParaRPr lang="en-US" sz="1250" dirty="0"/>
-          </a:p>
-        </p:txBody>
-      </p:sp>
-      <p:sp>
-        <p:nvSpPr>
-          <p:cNvPr id="14" name="Shape 9"/>
+              <a:t>What changed for the business, not what shipped internally.</a:t>
+            </a:r>
+            <a:endParaRPr lang="en-US" sz="1200" dirty="0"/>
+          </a:p>
+        </p:txBody>
+      </p:sp>
+      <p:sp>
+        <p:nvSpPr>
+          <p:cNvPr id="6" name="Shape 3"/>
           <p:cNvSpPr/>
           <p:nvPr/>
         </p:nvSpPr>
         <p:spPr>
           <a:xfrm>
-            <a:off x="548640" y="4251960"/>
+            <a:off x="548640" y="1417320"/>
             <a:ext cx="457200" cy="457200"/>
           </a:xfrm>
           <a:prstGeom prst="ellipse">
@@ -2840,23 +2413,288 @@
           </a:solidFill>
           <a:ln/>
         </p:spPr>
+        <p:txBody>
+          <a:bodyPr/>
+          <a:lstStyle/>
+          <a:p>
+            <a:endParaRPr lang="en-US"/>
+          </a:p>
+        </p:txBody>
       </p:sp>
       <p:pic>
         <p:nvPicPr>
-          <p:cNvPr id="15" name="Image 3" descr="preencoded.png">    </p:cNvPr>
+          <p:cNvPr id="7" name="Image 1" descr="preencoded.png"/>
           <p:cNvPicPr>
             <a:picLocks noChangeAspect="1"/>
           </p:cNvPicPr>
           <p:nvPr/>
         </p:nvPicPr>
         <p:blipFill>
-          <a:blip r:embed="rId4"/>
+          <a:blip r:embed="rId3"/>
           <a:stretch>
             <a:fillRect/>
           </a:stretch>
         </p:blipFill>
         <p:spPr>
           <a:xfrm>
+            <a:off x="612648" y="1481328"/>
+            <a:ext cx="329184" cy="329184"/>
+          </a:xfrm>
+          <a:prstGeom prst="rect">
+            <a:avLst/>
+          </a:prstGeom>
+        </p:spPr>
+      </p:pic>
+      <p:sp>
+        <p:nvSpPr>
+          <p:cNvPr id="8" name="Text 4"/>
+          <p:cNvSpPr txBox="1"/>
+          <p:nvPr/>
+        </p:nvSpPr>
+        <p:spPr>
+          <a:xfrm>
+            <a:off x="1188720" y="1389888"/>
+            <a:ext cx="10241280" cy="457200"/>
+          </a:xfrm>
+          <a:prstGeom prst="rect">
+            <a:avLst/>
+          </a:prstGeom>
+          <a:noFill/>
+          <a:ln/>
+        </p:spPr>
+        <p:txBody>
+          <a:bodyPr wrap="square" lIns="0" tIns="0" rIns="0" bIns="0" rtlCol="0" anchor="ctr"/>
+          <a:lstStyle/>
+          <a:p>
+            <a:pPr marL="0" indent="0">
+              <a:buNone/>
+            </a:pPr>
+            <a:r>
+              <a:rPr lang="en-US" sz="1600" b="1" dirty="0">
+                <a:solidFill>
+                  <a:srgbClr val="22252B"/>
+                </a:solidFill>
+                <a:latin typeface="Calibri" pitchFamily="34" charset="0"/>
+                <a:ea typeface="Calibri" pitchFamily="34" charset="-122"/>
+                <a:cs typeface="Calibri" pitchFamily="34" charset="-120"/>
+              </a:rPr>
+              <a:t>Customer onboarding time cut from 5 weeks to 12 days</a:t>
+            </a:r>
+            <a:endParaRPr lang="en-US" sz="1600" dirty="0"/>
+          </a:p>
+        </p:txBody>
+      </p:sp>
+      <p:sp>
+        <p:nvSpPr>
+          <p:cNvPr id="9" name="Text 5"/>
+          <p:cNvSpPr txBox="1"/>
+          <p:nvPr/>
+        </p:nvSpPr>
+        <p:spPr>
+          <a:xfrm>
+            <a:off x="1188720" y="1874520"/>
+            <a:ext cx="10241280" cy="502920"/>
+          </a:xfrm>
+          <a:prstGeom prst="rect">
+            <a:avLst/>
+          </a:prstGeom>
+          <a:noFill/>
+          <a:ln/>
+        </p:spPr>
+        <p:txBody>
+          <a:bodyPr wrap="square" lIns="0" tIns="0" rIns="0" bIns="0" rtlCol="0" anchor="ctr"/>
+          <a:lstStyle/>
+          <a:p>
+            <a:pPr marL="0" indent="0">
+              <a:buNone/>
+            </a:pPr>
+            <a:r>
+              <a:rPr lang="en-US" sz="1250" dirty="0">
+                <a:solidFill>
+                  <a:srgbClr val="5A5F6B"/>
+                </a:solidFill>
+                <a:latin typeface="Calibri" pitchFamily="34" charset="0"/>
+                <a:ea typeface="Calibri" pitchFamily="34" charset="-122"/>
+                <a:cs typeface="Calibri" pitchFamily="34" charset="-120"/>
+              </a:rPr>
+              <a:t>Early data shows a meaningful lift in trial-to-paid conversion; full quarter attribution in progress.</a:t>
+            </a:r>
+            <a:endParaRPr lang="en-US" sz="1250" dirty="0"/>
+          </a:p>
+        </p:txBody>
+      </p:sp>
+      <p:sp>
+        <p:nvSpPr>
+          <p:cNvPr id="10" name="Shape 6"/>
+          <p:cNvSpPr/>
+          <p:nvPr/>
+        </p:nvSpPr>
+        <p:spPr>
+          <a:xfrm>
+            <a:off x="548640" y="2834640"/>
+            <a:ext cx="457200" cy="457200"/>
+          </a:xfrm>
+          <a:prstGeom prst="ellipse">
+            <a:avLst/>
+          </a:prstGeom>
+          <a:solidFill>
+            <a:srgbClr val="1E2761"/>
+          </a:solidFill>
+          <a:ln/>
+        </p:spPr>
+        <p:txBody>
+          <a:bodyPr/>
+          <a:lstStyle/>
+          <a:p>
+            <a:endParaRPr lang="en-US"/>
+          </a:p>
+        </p:txBody>
+      </p:sp>
+      <p:pic>
+        <p:nvPicPr>
+          <p:cNvPr id="11" name="Image 2" descr="preencoded.png"/>
+          <p:cNvPicPr>
+            <a:picLocks noChangeAspect="1"/>
+          </p:cNvPicPr>
+          <p:nvPr/>
+        </p:nvPicPr>
+        <p:blipFill>
+          <a:blip r:embed="rId3"/>
+          <a:stretch>
+            <a:fillRect/>
+          </a:stretch>
+        </p:blipFill>
+        <p:spPr>
+          <a:xfrm>
+            <a:off x="612648" y="2898648"/>
+            <a:ext cx="329184" cy="329184"/>
+          </a:xfrm>
+          <a:prstGeom prst="rect">
+            <a:avLst/>
+          </a:prstGeom>
+        </p:spPr>
+      </p:pic>
+      <p:sp>
+        <p:nvSpPr>
+          <p:cNvPr id="12" name="Text 7"/>
+          <p:cNvSpPr txBox="1"/>
+          <p:nvPr/>
+        </p:nvSpPr>
+        <p:spPr>
+          <a:xfrm>
+            <a:off x="1188720" y="2807208"/>
+            <a:ext cx="10241280" cy="457200"/>
+          </a:xfrm>
+          <a:prstGeom prst="rect">
+            <a:avLst/>
+          </a:prstGeom>
+          <a:noFill/>
+          <a:ln/>
+        </p:spPr>
+        <p:txBody>
+          <a:bodyPr wrap="square" lIns="0" tIns="0" rIns="0" bIns="0" rtlCol="0" anchor="ctr"/>
+          <a:lstStyle/>
+          <a:p>
+            <a:pPr marL="0" indent="0">
+              <a:buNone/>
+            </a:pPr>
+            <a:r>
+              <a:rPr lang="en-US" sz="1600" b="1" dirty="0">
+                <a:solidFill>
+                  <a:srgbClr val="22252B"/>
+                </a:solidFill>
+                <a:latin typeface="Calibri" pitchFamily="34" charset="0"/>
+                <a:ea typeface="Calibri" pitchFamily="34" charset="-122"/>
+                <a:cs typeface="Calibri" pitchFamily="34" charset="-120"/>
+              </a:rPr>
+              <a:t>Self-serve pricing tier launched</a:t>
+            </a:r>
+            <a:endParaRPr lang="en-US" sz="1600" dirty="0"/>
+          </a:p>
+        </p:txBody>
+      </p:sp>
+      <p:sp>
+        <p:nvSpPr>
+          <p:cNvPr id="13" name="Text 8"/>
+          <p:cNvSpPr txBox="1"/>
+          <p:nvPr/>
+        </p:nvSpPr>
+        <p:spPr>
+          <a:xfrm>
+            <a:off x="1188720" y="3291840"/>
+            <a:ext cx="10241280" cy="502920"/>
+          </a:xfrm>
+          <a:prstGeom prst="rect">
+            <a:avLst/>
+          </a:prstGeom>
+          <a:noFill/>
+          <a:ln/>
+        </p:spPr>
+        <p:txBody>
+          <a:bodyPr wrap="square" lIns="0" tIns="0" rIns="0" bIns="0" rtlCol="0" anchor="ctr"/>
+          <a:lstStyle/>
+          <a:p>
+            <a:pPr marL="0" indent="0">
+              <a:buNone/>
+            </a:pPr>
+            <a:r>
+              <a:rPr lang="en-US" sz="1250" dirty="0">
+                <a:solidFill>
+                  <a:srgbClr val="5A5F6B"/>
+                </a:solidFill>
+                <a:latin typeface="Calibri" pitchFamily="34" charset="0"/>
+                <a:ea typeface="Calibri" pitchFamily="34" charset="-122"/>
+                <a:cs typeface="Calibri" pitchFamily="34" charset="-120"/>
+              </a:rPr>
+              <a:t>Opens a segment previously requiring a sales-assisted deal; first full quarter of bookings next update.</a:t>
+            </a:r>
+            <a:endParaRPr lang="en-US" sz="1250" dirty="0"/>
+          </a:p>
+        </p:txBody>
+      </p:sp>
+      <p:sp>
+        <p:nvSpPr>
+          <p:cNvPr id="14" name="Shape 9"/>
+          <p:cNvSpPr/>
+          <p:nvPr/>
+        </p:nvSpPr>
+        <p:spPr>
+          <a:xfrm>
+            <a:off x="548640" y="4251960"/>
+            <a:ext cx="457200" cy="457200"/>
+          </a:xfrm>
+          <a:prstGeom prst="ellipse">
+            <a:avLst/>
+          </a:prstGeom>
+          <a:solidFill>
+            <a:srgbClr val="1E2761"/>
+          </a:solidFill>
+          <a:ln/>
+        </p:spPr>
+        <p:txBody>
+          <a:bodyPr/>
+          <a:lstStyle/>
+          <a:p>
+            <a:endParaRPr lang="en-US"/>
+          </a:p>
+        </p:txBody>
+      </p:sp>
+      <p:pic>
+        <p:nvPicPr>
+          <p:cNvPr id="15" name="Image 3" descr="preencoded.png"/>
+          <p:cNvPicPr>
+            <a:picLocks noChangeAspect="1"/>
+          </p:cNvPicPr>
+          <p:nvPr/>
+        </p:nvPicPr>
+        <p:blipFill>
+          <a:blip r:embed="rId3"/>
+          <a:stretch>
+            <a:fillRect/>
+          </a:stretch>
+        </p:blipFill>
+        <p:spPr>
+          <a:xfrm>
             <a:off x="612648" y="4315968"/>
             <a:ext cx="329184" cy="329184"/>
           </a:xfrm>
@@ -2886,7 +2724,7 @@
           <a:bodyPr wrap="square" lIns="0" tIns="0" rIns="0" bIns="0" rtlCol="0" anchor="ctr"/>
           <a:lstStyle/>
           <a:p>
-            <a:pPr indent="0" marL="0">
+            <a:pPr marL="0" indent="0">
               <a:buNone/>
             </a:pPr>
             <a:r>
@@ -2925,7 +2763,7 @@
           <a:bodyPr wrap="square" lIns="0" tIns="0" rIns="0" bIns="0" rtlCol="0" anchor="ctr"/>
           <a:lstStyle/>
           <a:p>
-            <a:pPr indent="0" marL="0">
+            <a:pPr marL="0" indent="0">
               <a:buNone/>
             </a:pPr>
             <a:r>
@@ -2964,7 +2802,7 @@
           <a:bodyPr wrap="square" lIns="0" tIns="0" rIns="0" bIns="0" rtlCol="0" anchor="ctr"/>
           <a:lstStyle/>
           <a:p>
-            <a:pPr indent="0" marL="0">
+            <a:pPr marL="0" indent="0">
               <a:buNone/>
             </a:pPr>
             <a:r>
@@ -3003,7 +2841,7 @@
           <a:bodyPr wrap="square" lIns="0" tIns="0" rIns="0" bIns="0" rtlCol="0" anchor="ctr"/>
           <a:lstStyle/>
           <a:p>
-            <a:pPr algn="r" indent="0" marL="0">
+            <a:pPr marL="0" indent="0" algn="r">
               <a:buNone/>
             </a:pPr>
             <a:r>
@@ -3037,6 +2875,7 @@
         <a:solidFill>
           <a:srgbClr val="FFFFFF"/>
         </a:solidFill>
+        <a:effectLst/>
       </p:bgPr>
     </p:bg>
     <p:spTree>
@@ -3072,17 +2911,24 @@
           </a:solidFill>
           <a:ln/>
         </p:spPr>
+        <p:txBody>
+          <a:bodyPr/>
+          <a:lstStyle/>
+          <a:p>
+            <a:endParaRPr lang="en-US"/>
+          </a:p>
+        </p:txBody>
       </p:sp>
       <p:pic>
         <p:nvPicPr>
-          <p:cNvPr id="3" name="Image 0" descr="preencoded.png">    </p:cNvPr>
+          <p:cNvPr id="3" name="Image 0" descr="preencoded.png"/>
           <p:cNvPicPr>
             <a:picLocks noChangeAspect="1"/>
           </p:cNvPicPr>
           <p:nvPr/>
         </p:nvPicPr>
         <p:blipFill>
-          <a:blip r:embed="rId1"/>
+          <a:blip r:embed="rId3"/>
           <a:stretch>
             <a:fillRect/>
           </a:stretch>
@@ -3118,7 +2964,7 @@
           <a:bodyPr wrap="square" lIns="0" tIns="0" rIns="0" bIns="0" rtlCol="0" anchor="ctr"/>
           <a:lstStyle/>
           <a:p>
-            <a:pPr indent="0" marL="0">
+            <a:pPr marL="0" indent="0">
               <a:buNone/>
             </a:pPr>
             <a:r>
@@ -3157,11 +3003,11 @@
           <a:bodyPr wrap="square" lIns="0" tIns="0" rIns="0" bIns="0" rtlCol="0" anchor="ctr"/>
           <a:lstStyle/>
           <a:p>
-            <a:pPr indent="0" marL="0">
-              <a:buNone/>
-            </a:pPr>
-            <a:r>
-              <a:rPr lang="en-US" sz="1200" b="1" spc="100" kern="0" dirty="0">
+            <a:pPr marL="0" indent="0">
+              <a:buNone/>
+            </a:pPr>
+            <a:r>
+              <a:rPr lang="en-US" sz="1200" b="1" kern="0" spc="100" dirty="0">
                 <a:solidFill>
                   <a:srgbClr val="1E2761"/>
                 </a:solidFill>
@@ -3196,7 +3042,7 @@
           <a:bodyPr wrap="square" lIns="0" tIns="0" rIns="0" bIns="0" rtlCol="0" anchor="ctr"/>
           <a:lstStyle/>
           <a:p>
-            <a:pPr indent="0" marL="0">
+            <a:pPr marL="0" indent="0">
               <a:buNone/>
             </a:pPr>
             <a:r>
@@ -3235,7 +3081,7 @@
           <a:bodyPr wrap="square" lIns="0" tIns="0" rIns="0" bIns="0" rtlCol="0" anchor="ctr"/>
           <a:lstStyle/>
           <a:p>
-            <a:pPr indent="0" marL="0">
+            <a:pPr marL="0" indent="0">
               <a:buNone/>
             </a:pPr>
             <a:r>
@@ -3274,7 +3120,7 @@
           <a:bodyPr wrap="square" lIns="0" tIns="0" rIns="0" bIns="0" rtlCol="0" anchor="ctr"/>
           <a:lstStyle/>
           <a:p>
-            <a:pPr indent="0" marL="0">
+            <a:pPr marL="0" indent="0">
               <a:buNone/>
             </a:pPr>
             <a:r>
@@ -3314,6 +3160,13 @@
             <a:prstDash val="solid"/>
           </a:ln>
         </p:spPr>
+        <p:txBody>
+          <a:bodyPr/>
+          <a:lstStyle/>
+          <a:p>
+            <a:endParaRPr lang="en-US"/>
+          </a:p>
+        </p:txBody>
       </p:sp>
       <p:sp>
         <p:nvSpPr>
@@ -3336,7 +3189,7 @@
           <a:bodyPr wrap="square" lIns="0" tIns="0" rIns="0" bIns="0" rtlCol="0" anchor="ctr"/>
           <a:lstStyle/>
           <a:p>
-            <a:pPr indent="0" marL="0">
+            <a:pPr marL="0" indent="0">
               <a:buNone/>
             </a:pPr>
             <a:r>
@@ -3375,7 +3228,7 @@
           <a:bodyPr wrap="square" lIns="0" tIns="0" rIns="0" bIns="0" rtlCol="0" anchor="ctr"/>
           <a:lstStyle/>
           <a:p>
-            <a:pPr indent="0" marL="0">
+            <a:pPr marL="0" indent="0">
               <a:buNone/>
             </a:pPr>
             <a:r>
@@ -3414,7 +3267,7 @@
           <a:bodyPr wrap="square" lIns="0" tIns="0" rIns="0" bIns="0" rtlCol="0" anchor="ctr"/>
           <a:lstStyle/>
           <a:p>
-            <a:pPr indent="0" marL="0">
+            <a:pPr marL="0" indent="0">
               <a:buNone/>
             </a:pPr>
             <a:r>
@@ -3454,6 +3307,13 @@
             <a:prstDash val="solid"/>
           </a:ln>
         </p:spPr>
+        <p:txBody>
+          <a:bodyPr/>
+          <a:lstStyle/>
+          <a:p>
+            <a:endParaRPr lang="en-US"/>
+          </a:p>
+        </p:txBody>
       </p:sp>
       <p:sp>
         <p:nvSpPr>
@@ -3476,7 +3336,7 @@
           <a:bodyPr wrap="square" lIns="0" tIns="0" rIns="0" bIns="0" rtlCol="0" anchor="ctr"/>
           <a:lstStyle/>
           <a:p>
-            <a:pPr indent="0" marL="0">
+            <a:pPr marL="0" indent="0">
               <a:buNone/>
             </a:pPr>
             <a:r>
@@ -3515,7 +3375,7 @@
           <a:bodyPr wrap="square" lIns="0" tIns="0" rIns="0" bIns="0" rtlCol="0" anchor="ctr"/>
           <a:lstStyle/>
           <a:p>
-            <a:pPr indent="0" marL="0">
+            <a:pPr marL="0" indent="0">
               <a:buNone/>
             </a:pPr>
             <a:r>
@@ -3554,7 +3414,7 @@
           <a:bodyPr wrap="square" lIns="0" tIns="0" rIns="0" bIns="0" rtlCol="0" anchor="ctr"/>
           <a:lstStyle/>
           <a:p>
-            <a:pPr indent="0" marL="0">
+            <a:pPr marL="0" indent="0">
               <a:buNone/>
             </a:pPr>
             <a:r>
@@ -3594,6 +3454,13 @@
             <a:prstDash val="solid"/>
           </a:ln>
         </p:spPr>
+        <p:txBody>
+          <a:bodyPr/>
+          <a:lstStyle/>
+          <a:p>
+            <a:endParaRPr lang="en-US"/>
+          </a:p>
+        </p:txBody>
       </p:sp>
       <p:sp>
         <p:nvSpPr>
@@ -3616,7 +3483,7 @@
           <a:bodyPr wrap="square" lIns="0" tIns="0" rIns="0" bIns="0" rtlCol="0" anchor="ctr"/>
           <a:lstStyle/>
           <a:p>
-            <a:pPr indent="0" marL="0">
+            <a:pPr marL="0" indent="0">
               <a:buNone/>
             </a:pPr>
             <a:r>
@@ -3655,7 +3522,7 @@
           <a:bodyPr wrap="square" lIns="0" tIns="0" rIns="0" bIns="0" rtlCol="0" anchor="ctr"/>
           <a:lstStyle/>
           <a:p>
-            <a:pPr indent="0" marL="0">
+            <a:pPr marL="0" indent="0">
               <a:buNone/>
             </a:pPr>
             <a:r>
@@ -3694,7 +3561,7 @@
           <a:bodyPr wrap="square" lIns="0" tIns="0" rIns="0" bIns="0" rtlCol="0" anchor="ctr"/>
           <a:lstStyle/>
           <a:p>
-            <a:pPr indent="0" marL="0">
+            <a:pPr marL="0" indent="0">
               <a:buNone/>
             </a:pPr>
             <a:r>
@@ -3734,6 +3601,13 @@
             <a:prstDash val="solid"/>
           </a:ln>
         </p:spPr>
+        <p:txBody>
+          <a:bodyPr/>
+          <a:lstStyle/>
+          <a:p>
+            <a:endParaRPr lang="en-US"/>
+          </a:p>
+        </p:txBody>
       </p:sp>
       <p:sp>
         <p:nvSpPr>
@@ -3756,7 +3630,7 @@
           <a:bodyPr wrap="square" lIns="0" tIns="0" rIns="0" bIns="0" rtlCol="0" anchor="ctr"/>
           <a:lstStyle/>
           <a:p>
-            <a:pPr indent="0" marL="0">
+            <a:pPr marL="0" indent="0">
               <a:buNone/>
             </a:pPr>
             <a:r>
@@ -3796,6 +3670,13 @@
             <a:prstDash val="solid"/>
           </a:ln>
         </p:spPr>
+        <p:txBody>
+          <a:bodyPr/>
+          <a:lstStyle/>
+          <a:p>
+            <a:endParaRPr lang="en-US"/>
+          </a:p>
+        </p:txBody>
       </p:sp>
       <p:sp>
         <p:nvSpPr>
@@ -3816,17 +3697,24 @@
           </a:solidFill>
           <a:ln/>
         </p:spPr>
+        <p:txBody>
+          <a:bodyPr/>
+          <a:lstStyle/>
+          <a:p>
+            <a:endParaRPr lang="en-US"/>
+          </a:p>
+        </p:txBody>
       </p:sp>
       <p:pic>
         <p:nvPicPr>
-          <p:cNvPr id="25" name="Image 1" descr="preencoded.png">    </p:cNvPr>
+          <p:cNvPr id="25" name="Image 1" descr="preencoded.png"/>
           <p:cNvPicPr>
             <a:picLocks noChangeAspect="1"/>
           </p:cNvPicPr>
           <p:nvPr/>
         </p:nvPicPr>
         <p:blipFill>
-          <a:blip r:embed="rId2"/>
+          <a:blip r:embed="rId4"/>
           <a:stretch>
             <a:fillRect/>
           </a:stretch>
@@ -3862,11 +3750,11 @@
           <a:bodyPr wrap="square" lIns="0" tIns="0" rIns="0" bIns="0" rtlCol="0" anchor="ctr"/>
           <a:lstStyle/>
           <a:p>
-            <a:pPr indent="0" marL="0">
-              <a:buNone/>
-            </a:pPr>
-            <a:r>
-              <a:rPr lang="en-US" sz="1200" b="1" spc="100" kern="0" dirty="0">
+            <a:pPr marL="0" indent="0">
+              <a:buNone/>
+            </a:pPr>
+            <a:r>
+              <a:rPr lang="en-US" sz="1200" b="1" kern="0" spc="100" dirty="0">
                 <a:solidFill>
                   <a:srgbClr val="1E2761"/>
                 </a:solidFill>
@@ -3899,6 +3787,13 @@
           </a:solidFill>
           <a:ln/>
         </p:spPr>
+        <p:txBody>
+          <a:bodyPr/>
+          <a:lstStyle/>
+          <a:p>
+            <a:endParaRPr lang="en-US"/>
+          </a:p>
+        </p:txBody>
       </p:sp>
       <p:sp>
         <p:nvSpPr>
@@ -3921,7 +3816,7 @@
           <a:bodyPr wrap="square" lIns="0" tIns="0" rIns="0" bIns="0" rtlCol="0" anchor="ctr"/>
           <a:lstStyle/>
           <a:p>
-            <a:pPr indent="0" marL="0">
+            <a:pPr marL="0" indent="0">
               <a:buNone/>
             </a:pPr>
             <a:r>
@@ -3958,6 +3853,13 @@
           </a:solidFill>
           <a:ln/>
         </p:spPr>
+        <p:txBody>
+          <a:bodyPr/>
+          <a:lstStyle/>
+          <a:p>
+            <a:endParaRPr lang="en-US"/>
+          </a:p>
+        </p:txBody>
       </p:sp>
       <p:sp>
         <p:nvSpPr>
@@ -3980,7 +3882,7 @@
           <a:bodyPr wrap="square" lIns="0" tIns="0" rIns="0" bIns="0" rtlCol="0" anchor="ctr"/>
           <a:lstStyle/>
           <a:p>
-            <a:pPr indent="0" marL="0">
+            <a:pPr marL="0" indent="0">
               <a:buNone/>
             </a:pPr>
             <a:r>
@@ -4017,6 +3919,13 @@
           </a:solidFill>
           <a:ln/>
         </p:spPr>
+        <p:txBody>
+          <a:bodyPr/>
+          <a:lstStyle/>
+          <a:p>
+            <a:endParaRPr lang="en-US"/>
+          </a:p>
+        </p:txBody>
       </p:sp>
       <p:sp>
         <p:nvSpPr>
@@ -4039,7 +3948,7 @@
           <a:bodyPr wrap="square" lIns="0" tIns="0" rIns="0" bIns="0" rtlCol="0" anchor="ctr"/>
           <a:lstStyle/>
           <a:p>
-            <a:pPr indent="0" marL="0">
+            <a:pPr marL="0" indent="0">
               <a:buNone/>
             </a:pPr>
             <a:r>
@@ -4078,7 +3987,7 @@
           <a:bodyPr wrap="square" lIns="0" tIns="0" rIns="0" bIns="0" rtlCol="0" anchor="ctr"/>
           <a:lstStyle/>
           <a:p>
-            <a:pPr indent="0" marL="0">
+            <a:pPr marL="0" indent="0">
               <a:buNone/>
             </a:pPr>
             <a:r>
@@ -4117,7 +4026,7 @@
           <a:bodyPr wrap="square" lIns="0" tIns="0" rIns="0" bIns="0" rtlCol="0" anchor="ctr"/>
           <a:lstStyle/>
           <a:p>
-            <a:pPr indent="0" marL="0">
+            <a:pPr marL="0" indent="0">
               <a:buNone/>
             </a:pPr>
             <a:r>
@@ -4156,7 +4065,7 @@
           <a:bodyPr wrap="square" lIns="0" tIns="0" rIns="0" bIns="0" rtlCol="0" anchor="ctr"/>
           <a:lstStyle/>
           <a:p>
-            <a:pPr algn="r" indent="0" marL="0">
+            <a:pPr marL="0" indent="0" algn="r">
               <a:buNone/>
             </a:pPr>
             <a:r>
@@ -4190,6 +4099,7 @@
         <a:solidFill>
           <a:srgbClr val="FFFFFF"/>
         </a:solidFill>
+        <a:effectLst/>
       </p:bgPr>
     </p:bg>
     <p:spTree>
@@ -4225,17 +4135,24 @@
           </a:solidFill>
           <a:ln/>
         </p:spPr>
+        <p:txBody>
+          <a:bodyPr/>
+          <a:lstStyle/>
+          <a:p>
+            <a:endParaRPr lang="en-US"/>
+          </a:p>
+        </p:txBody>
       </p:sp>
       <p:pic>
         <p:nvPicPr>
-          <p:cNvPr id="3" name="Image 0" descr="preencoded.png">    </p:cNvPr>
+          <p:cNvPr id="3" name="Image 0" descr="preencoded.png"/>
           <p:cNvPicPr>
             <a:picLocks noChangeAspect="1"/>
           </p:cNvPicPr>
           <p:nvPr/>
         </p:nvPicPr>
         <p:blipFill>
-          <a:blip r:embed="rId1"/>
+          <a:blip r:embed="rId3"/>
           <a:stretch>
             <a:fillRect/>
           </a:stretch>
@@ -4271,7 +4188,7 @@
           <a:bodyPr wrap="square" lIns="0" tIns="0" rIns="0" bIns="0" rtlCol="0" anchor="ctr"/>
           <a:lstStyle/>
           <a:p>
-            <a:pPr indent="0" marL="0">
+            <a:pPr marL="0" indent="0">
               <a:buNone/>
             </a:pPr>
             <a:r>
@@ -4308,6 +4225,13 @@
           </a:solidFill>
           <a:ln/>
         </p:spPr>
+        <p:txBody>
+          <a:bodyPr/>
+          <a:lstStyle/>
+          <a:p>
+            <a:endParaRPr lang="en-US"/>
+          </a:p>
+        </p:txBody>
       </p:sp>
       <p:sp>
         <p:nvSpPr>
@@ -4330,7 +4254,7 @@
           <a:bodyPr wrap="square" lIns="0" tIns="0" rIns="0" bIns="0" rtlCol="0" anchor="ctr"/>
           <a:lstStyle/>
           <a:p>
-            <a:pPr indent="0" marL="0">
+            <a:pPr marL="0" indent="0">
               <a:buNone/>
             </a:pPr>
             <a:r>
@@ -4369,7 +4293,7 @@
           <a:bodyPr wrap="square" lIns="0" tIns="0" rIns="0" bIns="0" rtlCol="0" anchor="ctr"/>
           <a:lstStyle/>
           <a:p>
-            <a:pPr indent="0" marL="0">
+            <a:pPr marL="0" indent="0">
               <a:buNone/>
             </a:pPr>
             <a:r>
@@ -4408,7 +4332,7 @@
           <a:bodyPr wrap="square" lIns="0" tIns="0" rIns="0" bIns="0" rtlCol="0" anchor="ctr"/>
           <a:lstStyle/>
           <a:p>
-            <a:pPr indent="0" marL="0">
+            <a:pPr marL="0" indent="0">
               <a:buNone/>
             </a:pPr>
             <a:r>
@@ -4450,6 +4374,13 @@
             <a:prstDash val="solid"/>
           </a:ln>
         </p:spPr>
+        <p:txBody>
+          <a:bodyPr/>
+          <a:lstStyle/>
+          <a:p>
+            <a:endParaRPr lang="en-US"/>
+          </a:p>
+        </p:txBody>
       </p:sp>
       <p:sp>
         <p:nvSpPr>
@@ -4472,7 +4403,7 @@
           <a:bodyPr wrap="square" lIns="0" tIns="0" rIns="0" bIns="0" rtlCol="0" anchor="ctr"/>
           <a:lstStyle/>
           <a:p>
-            <a:pPr indent="0" marL="0">
+            <a:pPr marL="0" indent="0">
               <a:buNone/>
             </a:pPr>
             <a:r>
@@ -4511,7 +4442,7 @@
           <a:bodyPr wrap="square" lIns="0" tIns="0" rIns="0" bIns="0" rtlCol="0" anchor="ctr"/>
           <a:lstStyle/>
           <a:p>
-            <a:pPr indent="0" marL="0">
+            <a:pPr marL="0" indent="0">
               <a:buNone/>
             </a:pPr>
             <a:r>
@@ -4550,7 +4481,7 @@
           <a:bodyPr wrap="square" lIns="0" tIns="0" rIns="0" bIns="0" rtlCol="0" anchor="ctr"/>
           <a:lstStyle/>
           <a:p>
-            <a:pPr indent="0" marL="0">
+            <a:pPr marL="0" indent="0">
               <a:buNone/>
             </a:pPr>
             <a:r>
@@ -4592,6 +4523,13 @@
             <a:prstDash val="solid"/>
           </a:ln>
         </p:spPr>
+        <p:txBody>
+          <a:bodyPr/>
+          <a:lstStyle/>
+          <a:p>
+            <a:endParaRPr lang="en-US"/>
+          </a:p>
+        </p:txBody>
       </p:sp>
       <p:sp>
         <p:nvSpPr>
@@ -4614,7 +4552,7 @@
           <a:bodyPr wrap="square" lIns="0" tIns="0" rIns="0" bIns="0" rtlCol="0" anchor="ctr"/>
           <a:lstStyle/>
           <a:p>
-            <a:pPr indent="0" marL="0">
+            <a:pPr marL="0" indent="0">
               <a:buNone/>
             </a:pPr>
             <a:r>
@@ -4653,7 +4591,7 @@
           <a:bodyPr wrap="square" lIns="0" tIns="0" rIns="0" bIns="0" rtlCol="0" anchor="ctr"/>
           <a:lstStyle/>
           <a:p>
-            <a:pPr indent="0" marL="0">
+            <a:pPr marL="0" indent="0">
               <a:buNone/>
             </a:pPr>
             <a:r>
@@ -4692,7 +4630,7 @@
           <a:bodyPr wrap="square" lIns="0" tIns="0" rIns="0" bIns="0" rtlCol="0" anchor="ctr"/>
           <a:lstStyle/>
           <a:p>
-            <a:pPr indent="0" marL="0">
+            <a:pPr marL="0" indent="0">
               <a:buNone/>
             </a:pPr>
             <a:r>
@@ -4734,6 +4672,13 @@
             <a:prstDash val="solid"/>
           </a:ln>
         </p:spPr>
+        <p:txBody>
+          <a:bodyPr/>
+          <a:lstStyle/>
+          <a:p>
+            <a:endParaRPr lang="en-US"/>
+          </a:p>
+        </p:txBody>
       </p:sp>
       <p:sp>
         <p:nvSpPr>
@@ -4756,7 +4701,7 @@
           <a:bodyPr wrap="square" lIns="0" tIns="0" rIns="0" bIns="0" rtlCol="0" anchor="ctr"/>
           <a:lstStyle/>
           <a:p>
-            <a:pPr indent="0" marL="0">
+            <a:pPr marL="0" indent="0">
               <a:buNone/>
             </a:pPr>
             <a:r>
@@ -4795,7 +4740,7 @@
           <a:bodyPr wrap="square" lIns="0" tIns="0" rIns="0" bIns="0" rtlCol="0" anchor="ctr"/>
           <a:lstStyle/>
           <a:p>
-            <a:pPr indent="0" marL="0">
+            <a:pPr marL="0" indent="0">
               <a:buNone/>
             </a:pPr>
             <a:r>
@@ -4834,7 +4779,7 @@
           <a:bodyPr wrap="square" lIns="0" tIns="0" rIns="0" bIns="0" rtlCol="0" anchor="ctr"/>
           <a:lstStyle/>
           <a:p>
-            <a:pPr indent="0" marL="0">
+            <a:pPr marL="0" indent="0">
               <a:buNone/>
             </a:pPr>
             <a:r>
@@ -4873,7 +4818,7 @@
           <a:bodyPr wrap="square" lIns="0" tIns="0" rIns="0" bIns="0" rtlCol="0" anchor="ctr"/>
           <a:lstStyle/>
           <a:p>
-            <a:pPr indent="0" marL="0">
+            <a:pPr marL="0" indent="0">
               <a:buNone/>
             </a:pPr>
             <a:r>
@@ -4912,7 +4857,7 @@
           <a:bodyPr wrap="square" lIns="0" tIns="0" rIns="0" bIns="0" rtlCol="0" anchor="ctr"/>
           <a:lstStyle/>
           <a:p>
-            <a:pPr algn="r" indent="0" marL="0">
+            <a:pPr marL="0" indent="0" algn="r">
               <a:buNone/>
             </a:pPr>
             <a:r>
@@ -4946,6 +4891,7 @@
         <a:solidFill>
           <a:srgbClr val="FFFFFF"/>
         </a:solidFill>
+        <a:effectLst/>
       </p:bgPr>
     </p:bg>
     <p:spTree>
@@ -4981,17 +4927,24 @@
           </a:solidFill>
           <a:ln/>
         </p:spPr>
+        <p:txBody>
+          <a:bodyPr/>
+          <a:lstStyle/>
+          <a:p>
+            <a:endParaRPr lang="en-US"/>
+          </a:p>
+        </p:txBody>
       </p:sp>
       <p:pic>
         <p:nvPicPr>
-          <p:cNvPr id="3" name="Image 0" descr="preencoded.png">    </p:cNvPr>
+          <p:cNvPr id="3" name="Image 0" descr="preencoded.png"/>
           <p:cNvPicPr>
             <a:picLocks noChangeAspect="1"/>
           </p:cNvPicPr>
           <p:nvPr/>
         </p:nvPicPr>
         <p:blipFill>
-          <a:blip r:embed="rId1"/>
+          <a:blip r:embed="rId3"/>
           <a:stretch>
             <a:fillRect/>
           </a:stretch>
@@ -5027,7 +4980,7 @@
           <a:bodyPr wrap="square" lIns="0" tIns="0" rIns="0" bIns="0" rtlCol="0" anchor="ctr"/>
           <a:lstStyle/>
           <a:p>
-            <a:pPr indent="0" marL="0">
+            <a:pPr marL="0" indent="0">
               <a:buNone/>
             </a:pPr>
             <a:r>
@@ -5069,6 +5022,13 @@
             <a:prstDash val="solid"/>
           </a:ln>
         </p:spPr>
+        <p:txBody>
+          <a:bodyPr/>
+          <a:lstStyle/>
+          <a:p>
+            <a:endParaRPr lang="en-US"/>
+          </a:p>
+        </p:txBody>
       </p:sp>
       <p:sp>
         <p:nvSpPr>
@@ -5092,6 +5052,13 @@
             <a:prstDash val="solid"/>
           </a:ln>
         </p:spPr>
+        <p:txBody>
+          <a:bodyPr/>
+          <a:lstStyle/>
+          <a:p>
+            <a:endParaRPr lang="en-US"/>
+          </a:p>
+        </p:txBody>
       </p:sp>
       <p:sp>
         <p:nvSpPr>
@@ -5115,6 +5082,13 @@
             <a:prstDash val="solid"/>
           </a:ln>
         </p:spPr>
+        <p:txBody>
+          <a:bodyPr/>
+          <a:lstStyle/>
+          <a:p>
+            <a:endParaRPr lang="en-US"/>
+          </a:p>
+        </p:txBody>
       </p:sp>
       <p:sp>
         <p:nvSpPr>
@@ -5138,6 +5112,13 @@
             <a:prstDash val="solid"/>
           </a:ln>
         </p:spPr>
+        <p:txBody>
+          <a:bodyPr/>
+          <a:lstStyle/>
+          <a:p>
+            <a:endParaRPr lang="en-US"/>
+          </a:p>
+        </p:txBody>
       </p:sp>
       <p:sp>
         <p:nvSpPr>
@@ -5161,6 +5142,13 @@
             <a:prstDash val="solid"/>
           </a:ln>
         </p:spPr>
+        <p:txBody>
+          <a:bodyPr/>
+          <a:lstStyle/>
+          <a:p>
+            <a:endParaRPr lang="en-US"/>
+          </a:p>
+        </p:txBody>
       </p:sp>
       <p:sp>
         <p:nvSpPr>
@@ -5184,6 +5172,13 @@
             <a:prstDash val="solid"/>
           </a:ln>
         </p:spPr>
+        <p:txBody>
+          <a:bodyPr/>
+          <a:lstStyle/>
+          <a:p>
+            <a:endParaRPr lang="en-US"/>
+          </a:p>
+        </p:txBody>
       </p:sp>
       <p:sp>
         <p:nvSpPr>
@@ -5207,6 +5202,13 @@
             <a:prstDash val="solid"/>
           </a:ln>
         </p:spPr>
+        <p:txBody>
+          <a:bodyPr/>
+          <a:lstStyle/>
+          <a:p>
+            <a:endParaRPr lang="en-US"/>
+          </a:p>
+        </p:txBody>
       </p:sp>
       <p:sp>
         <p:nvSpPr>
@@ -5230,6 +5232,13 @@
             <a:prstDash val="solid"/>
           </a:ln>
         </p:spPr>
+        <p:txBody>
+          <a:bodyPr/>
+          <a:lstStyle/>
+          <a:p>
+            <a:endParaRPr lang="en-US"/>
+          </a:p>
+        </p:txBody>
       </p:sp>
       <p:sp>
         <p:nvSpPr>
@@ -5253,6 +5262,13 @@
             <a:prstDash val="solid"/>
           </a:ln>
         </p:spPr>
+        <p:txBody>
+          <a:bodyPr/>
+          <a:lstStyle/>
+          <a:p>
+            <a:endParaRPr lang="en-US"/>
+          </a:p>
+        </p:txBody>
       </p:sp>
       <p:sp>
         <p:nvSpPr>
@@ -5278,6 +5294,13 @@
             <a:prstDash val="solid"/>
           </a:ln>
         </p:spPr>
+        <p:txBody>
+          <a:bodyPr/>
+          <a:lstStyle/>
+          <a:p>
+            <a:endParaRPr lang="en-US"/>
+          </a:p>
+        </p:txBody>
       </p:sp>
       <p:sp>
         <p:nvSpPr>
@@ -5300,7 +5323,7 @@
           <a:bodyPr wrap="square" lIns="0" tIns="0" rIns="0" bIns="0" rtlCol="0" anchor="ctr"/>
           <a:lstStyle/>
           <a:p>
-            <a:pPr algn="ctr" indent="0" marL="0">
+            <a:pPr marL="0" indent="0" algn="ctr">
               <a:buNone/>
             </a:pPr>
             <a:r>
@@ -5342,6 +5365,13 @@
             <a:prstDash val="solid"/>
           </a:ln>
         </p:spPr>
+        <p:txBody>
+          <a:bodyPr/>
+          <a:lstStyle/>
+          <a:p>
+            <a:endParaRPr lang="en-US"/>
+          </a:p>
+        </p:txBody>
       </p:sp>
       <p:sp>
         <p:nvSpPr>
@@ -5364,7 +5394,7 @@
           <a:bodyPr wrap="square" lIns="0" tIns="0" rIns="0" bIns="0" rtlCol="0" anchor="ctr"/>
           <a:lstStyle/>
           <a:p>
-            <a:pPr algn="ctr" indent="0" marL="0">
+            <a:pPr marL="0" indent="0" algn="ctr">
               <a:buNone/>
             </a:pPr>
             <a:r>
@@ -5406,6 +5436,13 @@
             <a:prstDash val="solid"/>
           </a:ln>
         </p:spPr>
+        <p:txBody>
+          <a:bodyPr/>
+          <a:lstStyle/>
+          <a:p>
+            <a:endParaRPr lang="en-US"/>
+          </a:p>
+        </p:txBody>
       </p:sp>
       <p:sp>
         <p:nvSpPr>
@@ -5428,7 +5465,7 @@
           <a:bodyPr wrap="square" lIns="0" tIns="0" rIns="0" bIns="0" rtlCol="0" anchor="ctr"/>
           <a:lstStyle/>
           <a:p>
-            <a:pPr algn="ctr" indent="0" marL="0">
+            <a:pPr marL="0" indent="0" algn="ctr">
               <a:buNone/>
             </a:pPr>
             <a:r>
@@ -5470,6 +5507,13 @@
             <a:prstDash val="solid"/>
           </a:ln>
         </p:spPr>
+        <p:txBody>
+          <a:bodyPr/>
+          <a:lstStyle/>
+          <a:p>
+            <a:endParaRPr lang="en-US"/>
+          </a:p>
+        </p:txBody>
       </p:sp>
       <p:sp>
         <p:nvSpPr>
@@ -5492,7 +5536,7 @@
           <a:bodyPr wrap="square" lIns="0" tIns="0" rIns="0" bIns="0" rtlCol="0" anchor="ctr"/>
           <a:lstStyle/>
           <a:p>
-            <a:pPr algn="ctr" indent="0" marL="0">
+            <a:pPr marL="0" indent="0" algn="ctr">
               <a:buNone/>
             </a:pPr>
             <a:r>
@@ -5534,6 +5578,13 @@
             <a:prstDash val="solid"/>
           </a:ln>
         </p:spPr>
+        <p:txBody>
+          <a:bodyPr/>
+          <a:lstStyle/>
+          <a:p>
+            <a:endParaRPr lang="en-US"/>
+          </a:p>
+        </p:txBody>
       </p:sp>
       <p:sp>
         <p:nvSpPr>
@@ -5556,7 +5607,7 @@
           <a:bodyPr wrap="square" lIns="0" tIns="0" rIns="0" bIns="0" rtlCol="0" anchor="ctr"/>
           <a:lstStyle/>
           <a:p>
-            <a:pPr algn="ctr" indent="0" marL="0">
+            <a:pPr marL="0" indent="0" algn="ctr">
               <a:buNone/>
             </a:pPr>
             <a:r>
@@ -5595,7 +5646,7 @@
           <a:bodyPr wrap="square" lIns="0" tIns="0" rIns="0" bIns="0" rtlCol="0" anchor="ctr"/>
           <a:lstStyle/>
           <a:p>
-            <a:pPr indent="0" marL="0">
+            <a:pPr marL="0" indent="0">
               <a:buNone/>
             </a:pPr>
             <a:r>
@@ -5634,7 +5685,7 @@
           <a:bodyPr wrap="square" lIns="0" tIns="0" rIns="0" bIns="0" rtlCol="0" anchor="ctr"/>
           <a:lstStyle/>
           <a:p>
-            <a:pPr algn="r" indent="0" marL="0">
+            <a:pPr marL="0" indent="0" algn="r">
               <a:buNone/>
             </a:pPr>
             <a:r>
@@ -5673,11 +5724,11 @@
           <a:bodyPr wrap="square" lIns="0" tIns="0" rIns="0" bIns="0" rtlCol="0" anchor="ctr"/>
           <a:lstStyle/>
           <a:p>
-            <a:pPr indent="0" marL="0">
-              <a:buNone/>
-            </a:pPr>
-            <a:r>
-              <a:rPr lang="en-US" sz="1100" b="1" spc="100" kern="0" dirty="0">
+            <a:pPr marL="0" indent="0">
+              <a:buNone/>
+            </a:pPr>
+            <a:r>
+              <a:rPr lang="en-US" sz="1100" b="1" kern="0" spc="100" dirty="0">
                 <a:solidFill>
                   <a:srgbClr val="1E2761"/>
                 </a:solidFill>
@@ -5710,6 +5761,13 @@
           </a:solidFill>
           <a:ln/>
         </p:spPr>
+        <p:txBody>
+          <a:bodyPr/>
+          <a:lstStyle/>
+          <a:p>
+            <a:endParaRPr lang="en-US"/>
+          </a:p>
+        </p:txBody>
       </p:sp>
       <p:sp>
         <p:nvSpPr>
@@ -5732,7 +5790,7 @@
           <a:bodyPr wrap="square" lIns="0" tIns="0" rIns="0" bIns="0" rtlCol="0" anchor="ctr"/>
           <a:lstStyle/>
           <a:p>
-            <a:pPr algn="ctr" indent="0" marL="0">
+            <a:pPr marL="0" indent="0" algn="ctr">
               <a:buNone/>
             </a:pPr>
             <a:r>
@@ -5771,7 +5829,7 @@
           <a:bodyPr wrap="square" lIns="0" tIns="0" rIns="0" bIns="0" rtlCol="0" anchor="ctr"/>
           <a:lstStyle/>
           <a:p>
-            <a:pPr indent="0" marL="0">
+            <a:pPr marL="0" indent="0">
               <a:buNone/>
             </a:pPr>
             <a:r>
@@ -5808,6 +5866,13 @@
           </a:solidFill>
           <a:ln/>
         </p:spPr>
+        <p:txBody>
+          <a:bodyPr/>
+          <a:lstStyle/>
+          <a:p>
+            <a:endParaRPr lang="en-US"/>
+          </a:p>
+        </p:txBody>
       </p:sp>
       <p:sp>
         <p:nvSpPr>
@@ -5830,7 +5895,7 @@
           <a:bodyPr wrap="square" lIns="0" tIns="0" rIns="0" bIns="0" rtlCol="0" anchor="ctr"/>
           <a:lstStyle/>
           <a:p>
-            <a:pPr algn="ctr" indent="0" marL="0">
+            <a:pPr marL="0" indent="0" algn="ctr">
               <a:buNone/>
             </a:pPr>
             <a:r>
@@ -5869,7 +5934,7 @@
           <a:bodyPr wrap="square" lIns="0" tIns="0" rIns="0" bIns="0" rtlCol="0" anchor="ctr"/>
           <a:lstStyle/>
           <a:p>
-            <a:pPr indent="0" marL="0">
+            <a:pPr marL="0" indent="0">
               <a:buNone/>
             </a:pPr>
             <a:r>
@@ -5906,6 +5971,13 @@
           </a:solidFill>
           <a:ln/>
         </p:spPr>
+        <p:txBody>
+          <a:bodyPr/>
+          <a:lstStyle/>
+          <a:p>
+            <a:endParaRPr lang="en-US"/>
+          </a:p>
+        </p:txBody>
       </p:sp>
       <p:sp>
         <p:nvSpPr>
@@ -5928,7 +6000,7 @@
           <a:bodyPr wrap="square" lIns="0" tIns="0" rIns="0" bIns="0" rtlCol="0" anchor="ctr"/>
           <a:lstStyle/>
           <a:p>
-            <a:pPr algn="ctr" indent="0" marL="0">
+            <a:pPr marL="0" indent="0" algn="ctr">
               <a:buNone/>
             </a:pPr>
             <a:r>
@@ -5967,7 +6039,7 @@
           <a:bodyPr wrap="square" lIns="0" tIns="0" rIns="0" bIns="0" rtlCol="0" anchor="ctr"/>
           <a:lstStyle/>
           <a:p>
-            <a:pPr indent="0" marL="0">
+            <a:pPr marL="0" indent="0">
               <a:buNone/>
             </a:pPr>
             <a:r>
@@ -6004,6 +6076,13 @@
           </a:solidFill>
           <a:ln/>
         </p:spPr>
+        <p:txBody>
+          <a:bodyPr/>
+          <a:lstStyle/>
+          <a:p>
+            <a:endParaRPr lang="en-US"/>
+          </a:p>
+        </p:txBody>
       </p:sp>
       <p:sp>
         <p:nvSpPr>
@@ -6026,7 +6105,7 @@
           <a:bodyPr wrap="square" lIns="0" tIns="0" rIns="0" bIns="0" rtlCol="0" anchor="ctr"/>
           <a:lstStyle/>
           <a:p>
-            <a:pPr algn="ctr" indent="0" marL="0">
+            <a:pPr marL="0" indent="0" algn="ctr">
               <a:buNone/>
             </a:pPr>
             <a:r>
@@ -6065,7 +6144,7 @@
           <a:bodyPr wrap="square" lIns="0" tIns="0" rIns="0" bIns="0" rtlCol="0" anchor="ctr"/>
           <a:lstStyle/>
           <a:p>
-            <a:pPr indent="0" marL="0">
+            <a:pPr marL="0" indent="0">
               <a:buNone/>
             </a:pPr>
             <a:r>
@@ -6102,6 +6181,13 @@
           </a:solidFill>
           <a:ln/>
         </p:spPr>
+        <p:txBody>
+          <a:bodyPr/>
+          <a:lstStyle/>
+          <a:p>
+            <a:endParaRPr lang="en-US"/>
+          </a:p>
+        </p:txBody>
       </p:sp>
       <p:sp>
         <p:nvSpPr>
@@ -6124,7 +6210,7 @@
           <a:bodyPr wrap="square" lIns="0" tIns="0" rIns="0" bIns="0" rtlCol="0" anchor="ctr"/>
           <a:lstStyle/>
           <a:p>
-            <a:pPr algn="ctr" indent="0" marL="0">
+            <a:pPr marL="0" indent="0" algn="ctr">
               <a:buNone/>
             </a:pPr>
             <a:r>
@@ -6163,7 +6249,7 @@
           <a:bodyPr wrap="square" lIns="0" tIns="0" rIns="0" bIns="0" rtlCol="0" anchor="ctr"/>
           <a:lstStyle/>
           <a:p>
-            <a:pPr indent="0" marL="0">
+            <a:pPr marL="0" indent="0">
               <a:buNone/>
             </a:pPr>
             <a:r>
@@ -6207,6 +6293,13 @@
             <a:prstDash val="solid"/>
           </a:ln>
         </p:spPr>
+        <p:txBody>
+          <a:bodyPr/>
+          <a:lstStyle/>
+          <a:p>
+            <a:endParaRPr lang="en-US"/>
+          </a:p>
+        </p:txBody>
       </p:sp>
       <p:sp>
         <p:nvSpPr>
@@ -6229,7 +6322,7 @@
           <a:bodyPr wrap="square" lIns="0" tIns="0" rIns="0" bIns="0" rtlCol="0" anchor="ctr"/>
           <a:lstStyle/>
           <a:p>
-            <a:pPr indent="0" marL="0">
+            <a:pPr marL="0" indent="0">
               <a:buNone/>
             </a:pPr>
             <a:r>
@@ -6268,7 +6361,7 @@
           <a:bodyPr wrap="square" lIns="0" tIns="0" rIns="0" bIns="0" rtlCol="0" anchor="ctr"/>
           <a:lstStyle/>
           <a:p>
-            <a:pPr indent="0" marL="0">
+            <a:pPr marL="0" indent="0">
               <a:buNone/>
             </a:pPr>
             <a:r>
@@ -6307,7 +6400,7 @@
           <a:bodyPr wrap="square" lIns="0" tIns="0" rIns="0" bIns="0" rtlCol="0" anchor="ctr"/>
           <a:lstStyle/>
           <a:p>
-            <a:pPr indent="0" marL="0">
+            <a:pPr marL="0" indent="0">
               <a:buNone/>
             </a:pPr>
             <a:r>
@@ -6346,7 +6439,7 @@
           <a:bodyPr wrap="square" lIns="0" tIns="0" rIns="0" bIns="0" rtlCol="0" anchor="ctr"/>
           <a:lstStyle/>
           <a:p>
-            <a:pPr algn="r" indent="0" marL="0">
+            <a:pPr marL="0" indent="0" algn="r">
               <a:buNone/>
             </a:pPr>
             <a:r>
@@ -6380,6 +6473,7 @@
         <a:solidFill>
           <a:srgbClr val="FFFFFF"/>
         </a:solidFill>
+        <a:effectLst/>
       </p:bgPr>
     </p:bg>
     <p:spTree>
@@ -6415,17 +6509,24 @@
           </a:solidFill>
           <a:ln/>
         </p:spPr>
+        <p:txBody>
+          <a:bodyPr/>
+          <a:lstStyle/>
+          <a:p>
+            <a:endParaRPr lang="en-US"/>
+          </a:p>
+        </p:txBody>
       </p:sp>
       <p:pic>
         <p:nvPicPr>
-          <p:cNvPr id="3" name="Image 0" descr="preencoded.png">    </p:cNvPr>
+          <p:cNvPr id="3" name="Image 0" descr="preencoded.png"/>
           <p:cNvPicPr>
             <a:picLocks noChangeAspect="1"/>
           </p:cNvPicPr>
           <p:nvPr/>
         </p:nvPicPr>
         <p:blipFill>
-          <a:blip r:embed="rId1"/>
+          <a:blip r:embed="rId3"/>
           <a:stretch>
             <a:fillRect/>
           </a:stretch>
@@ -6461,7 +6562,7 @@
           <a:bodyPr wrap="square" lIns="0" tIns="0" rIns="0" bIns="0" rtlCol="0" anchor="ctr"/>
           <a:lstStyle/>
           <a:p>
-            <a:pPr indent="0" marL="0">
+            <a:pPr marL="0" indent="0">
               <a:buNone/>
             </a:pPr>
             <a:r>
@@ -6500,6 +6601,13 @@
           </a:solidFill>
           <a:ln/>
         </p:spPr>
+        <p:txBody>
+          <a:bodyPr/>
+          <a:lstStyle/>
+          <a:p>
+            <a:endParaRPr lang="en-US"/>
+          </a:p>
+        </p:txBody>
       </p:sp>
       <p:sp>
         <p:nvSpPr>
@@ -6522,11 +6630,11 @@
           <a:bodyPr wrap="square" lIns="0" tIns="0" rIns="0" bIns="0" rtlCol="0" anchor="ctr"/>
           <a:lstStyle/>
           <a:p>
-            <a:pPr indent="0" marL="0">
-              <a:buNone/>
-            </a:pPr>
-            <a:r>
-              <a:rPr lang="en-US" sz="1100" b="1" spc="100" kern="0" dirty="0">
+            <a:pPr marL="0" indent="0">
+              <a:buNone/>
+            </a:pPr>
+            <a:r>
+              <a:rPr lang="en-US" sz="1100" b="1" kern="0" spc="100" dirty="0">
                 <a:solidFill>
                   <a:srgbClr val="CADCFC"/>
                 </a:solidFill>
@@ -6561,7 +6669,7 @@
           <a:bodyPr wrap="square" lIns="0" tIns="0" rIns="0" bIns="0" rtlCol="0" anchor="ctr"/>
           <a:lstStyle/>
           <a:p>
-            <a:pPr indent="0" marL="0">
+            <a:pPr marL="0" indent="0">
               <a:buNone/>
             </a:pPr>
             <a:r>
@@ -6600,7 +6708,7 @@
           <a:bodyPr wrap="square" lIns="0" tIns="0" rIns="0" bIns="0" rtlCol="0" anchor="ctr"/>
           <a:lstStyle/>
           <a:p>
-            <a:pPr indent="0" marL="0">
+            <a:pPr marL="0" indent="0">
               <a:buNone/>
             </a:pPr>
             <a:r>
@@ -6637,6 +6745,13 @@
           </a:solidFill>
           <a:ln/>
         </p:spPr>
+        <p:txBody>
+          <a:bodyPr/>
+          <a:lstStyle/>
+          <a:p>
+            <a:endParaRPr lang="en-US"/>
+          </a:p>
+        </p:txBody>
       </p:sp>
       <p:sp>
         <p:nvSpPr>
@@ -6659,7 +6774,7 @@
           <a:bodyPr wrap="square" lIns="0" tIns="0" rIns="0" bIns="0" rtlCol="0" anchor="ctr"/>
           <a:lstStyle/>
           <a:p>
-            <a:pPr indent="0" marL="0">
+            <a:pPr marL="0" indent="0">
               <a:buNone/>
             </a:pPr>
             <a:r>
@@ -6696,6 +6811,13 @@
           </a:solidFill>
           <a:ln/>
         </p:spPr>
+        <p:txBody>
+          <a:bodyPr/>
+          <a:lstStyle/>
+          <a:p>
+            <a:endParaRPr lang="en-US"/>
+          </a:p>
+        </p:txBody>
       </p:sp>
       <p:sp>
         <p:nvSpPr>
@@ -6718,7 +6840,7 @@
           <a:bodyPr wrap="square" lIns="0" tIns="0" rIns="0" bIns="0" rtlCol="0" anchor="ctr"/>
           <a:lstStyle/>
           <a:p>
-            <a:pPr indent="0" marL="0">
+            <a:pPr marL="0" indent="0">
               <a:buNone/>
             </a:pPr>
             <a:r>
@@ -6757,7 +6879,7 @@
           <a:bodyPr wrap="square" lIns="0" tIns="0" rIns="0" bIns="0" rtlCol="0" anchor="ctr"/>
           <a:lstStyle/>
           <a:p>
-            <a:pPr indent="0" marL="0">
+            <a:pPr marL="0" indent="0">
               <a:buNone/>
             </a:pPr>
             <a:r>
@@ -6796,7 +6918,7 @@
           <a:bodyPr wrap="square" lIns="0" tIns="0" rIns="0" bIns="0" rtlCol="0" anchor="ctr"/>
           <a:lstStyle/>
           <a:p>
-            <a:pPr algn="r" indent="0" marL="0">
+            <a:pPr marL="0" indent="0" algn="r">
               <a:buNone/>
             </a:pPr>
             <a:r>
@@ -7115,4 +7237,319 @@
     </a:ext>
   </a:extLst>
 </a:theme>
+</file>
+
+<file path=ppt/theme/theme2.xml><?xml version="1.0" encoding="utf-8"?>
+<a:theme xmlns:a="http://schemas.openxmlformats.org/drawingml/2006/main" name="Office Theme">
+  <a:themeElements>
+    <a:clrScheme name="Office">
+      <a:dk1>
+        <a:sysClr val="windowText" lastClr="000000"/>
+      </a:dk1>
+      <a:lt1>
+        <a:sysClr val="window" lastClr="FFFFFF"/>
+      </a:lt1>
+      <a:dk2>
+        <a:srgbClr val="0E2841"/>
+      </a:dk2>
+      <a:lt2>
+        <a:srgbClr val="E8E8E8"/>
+      </a:lt2>
+      <a:accent1>
+        <a:srgbClr val="156082"/>
+      </a:accent1>
+      <a:accent2>
+        <a:srgbClr val="E97132"/>
+      </a:accent2>
+      <a:accent3>
+        <a:srgbClr val="196B24"/>
+      </a:accent3>
+      <a:accent4>
+        <a:srgbClr val="0F9ED5"/>
+      </a:accent4>
+      <a:accent5>
+        <a:srgbClr val="A02B93"/>
+      </a:accent5>
+      <a:accent6>
+        <a:srgbClr val="4EA72E"/>
+      </a:accent6>
+      <a:hlink>
+        <a:srgbClr val="467886"/>
+      </a:hlink>
+      <a:folHlink>
+        <a:srgbClr val="96607D"/>
+      </a:folHlink>
+    </a:clrScheme>
+    <a:fontScheme name="Office">
+      <a:majorFont>
+        <a:latin typeface="Aptos Display" panose="02110004020202020204"/>
+        <a:ea typeface=""/>
+        <a:cs typeface=""/>
+        <a:font script="Jpan" typeface="游ゴシック Light"/>
+        <a:font script="Hang" typeface="맑은 고딕"/>
+        <a:font script="Hans" typeface="等线 Light"/>
+        <a:font script="Hant" typeface="新細明體"/>
+        <a:font script="Arab" typeface="Times New Roman"/>
+        <a:font script="Hebr" typeface="Times New Roman"/>
+        <a:font script="Thai" typeface="Angsana New"/>
+        <a:font script="Ethi" typeface="Nyala"/>
+        <a:font script="Beng" typeface="Vrinda"/>
+        <a:font script="Gujr" typeface="Shruti"/>
+        <a:font script="Khmr" typeface="MoolBoran"/>
+        <a:font script="Knda" typeface="Tunga"/>
+        <a:font script="Guru" typeface="Raavi"/>
+        <a:font script="Cans" typeface="Euphemia"/>
+        <a:font script="Cher" typeface="Plantagenet Cherokee"/>
+        <a:font script="Yiii" typeface="Microsoft Yi Baiti"/>
+        <a:font script="Tibt" typeface="Microsoft Himalaya"/>
+        <a:font script="Thaa" typeface="MV Boli"/>
+        <a:font script="Deva" typeface="Mangal"/>
+        <a:font script="Telu" typeface="Gautami"/>
+        <a:font script="Taml" typeface="Latha"/>
+        <a:font script="Syrc" typeface="Estrangelo Edessa"/>
+        <a:font script="Orya" typeface="Kalinga"/>
+        <a:font script="Mlym" typeface="Kartika"/>
+        <a:font script="Laoo" typeface="DokChampa"/>
+        <a:font script="Sinh" typeface="Iskoola Pota"/>
+        <a:font script="Mong" typeface="Mongolian Baiti"/>
+        <a:font script="Viet" typeface="Times New Roman"/>
+        <a:font script="Uigh" typeface="Microsoft Uighur"/>
+        <a:font script="Geor" typeface="Sylfaen"/>
+        <a:font script="Armn" typeface="Arial"/>
+        <a:font script="Bugi" typeface="Leelawadee UI"/>
+        <a:font script="Bopo" typeface="Microsoft JhengHei"/>
+        <a:font script="Java" typeface="Javanese Text"/>
+        <a:font script="Lisu" typeface="Segoe UI"/>
+        <a:font script="Mymr" typeface="Myanmar Text"/>
+        <a:font script="Nkoo" typeface="Ebrima"/>
+        <a:font script="Olck" typeface="Nirmala UI"/>
+        <a:font script="Osma" typeface="Ebrima"/>
+        <a:font script="Phag" typeface="Phagspa"/>
+        <a:font script="Syrn" typeface="Estrangelo Edessa"/>
+        <a:font script="Syrj" typeface="Estrangelo Edessa"/>
+        <a:font script="Syre" typeface="Estrangelo Edessa"/>
+        <a:font script="Sora" typeface="Nirmala UI"/>
+        <a:font script="Tale" typeface="Microsoft Tai Le"/>
+        <a:font script="Talu" typeface="Microsoft New Tai Lue"/>
+        <a:font script="Tfng" typeface="Ebrima"/>
+      </a:majorFont>
+      <a:minorFont>
+        <a:latin typeface="Aptos" panose="02110004020202020204"/>
+        <a:ea typeface=""/>
+        <a:cs typeface=""/>
+        <a:font script="Jpan" typeface="游ゴシック"/>
+        <a:font script="Hang" typeface="맑은 고딕"/>
+        <a:font script="Hans" typeface="等线"/>
+        <a:font script="Hant" typeface="新細明體"/>
+        <a:font script="Arab" typeface="Arial"/>
+        <a:font script="Hebr" typeface="Arial"/>
+        <a:font script="Thai" typeface="Cordia New"/>
+        <a:font script="Ethi" typeface="Nyala"/>
+        <a:font script="Beng" typeface="Vrinda"/>
+        <a:font script="Gujr" typeface="Shruti"/>
+        <a:font script="Khmr" typeface="DaunPenh"/>
+        <a:font script="Knda" typeface="Tunga"/>
+        <a:font script="Guru" typeface="Raavi"/>
+        <a:font script="Cans" typeface="Euphemia"/>
+        <a:font script="Cher" typeface="Plantagenet Cherokee"/>
+        <a:font script="Yiii" typeface="Microsoft Yi Baiti"/>
+        <a:font script="Tibt" typeface="Microsoft Himalaya"/>
+        <a:font script="Thaa" typeface="MV Boli"/>
+        <a:font script="Deva" typeface="Mangal"/>
+        <a:font script="Telu" typeface="Gautami"/>
+        <a:font script="Taml" typeface="Latha"/>
+        <a:font script="Syrc" typeface="Estrangelo Edessa"/>
+        <a:font script="Orya" typeface="Kalinga"/>
+        <a:font script="Mlym" typeface="Kartika"/>
+        <a:font script="Laoo" typeface="DokChampa"/>
+        <a:font script="Sinh" typeface="Iskoola Pota"/>
+        <a:font script="Mong" typeface="Mongolian Baiti"/>
+        <a:font script="Viet" typeface="Arial"/>
+        <a:font script="Uigh" typeface="Microsoft Uighur"/>
+        <a:font script="Geor" typeface="Sylfaen"/>
+        <a:font script="Armn" typeface="Arial"/>
+        <a:font script="Bugi" typeface="Leelawadee UI"/>
+        <a:font script="Bopo" typeface="Microsoft JhengHei"/>
+        <a:font script="Java" typeface="Javanese Text"/>
+        <a:font script="Lisu" typeface="Segoe UI"/>
+        <a:font script="Mymr" typeface="Myanmar Text"/>
+        <a:font script="Nkoo" typeface="Ebrima"/>
+        <a:font script="Olck" typeface="Nirmala UI"/>
+        <a:font script="Osma" typeface="Ebrima"/>
+        <a:font script="Phag" typeface="Phagspa"/>
+        <a:font script="Syrn" typeface="Estrangelo Edessa"/>
+        <a:font script="Syrj" typeface="Estrangelo Edessa"/>
+        <a:font script="Syre" typeface="Estrangelo Edessa"/>
+        <a:font script="Sora" typeface="Nirmala UI"/>
+        <a:font script="Tale" typeface="Microsoft Tai Le"/>
+        <a:font script="Talu" typeface="Microsoft New Tai Lue"/>
+        <a:font script="Tfng" typeface="Ebrima"/>
+      </a:minorFont>
+    </a:fontScheme>
+    <a:fmtScheme name="Office">
+      <a:fillStyleLst>
+        <a:solidFill>
+          <a:schemeClr val="phClr"/>
+        </a:solidFill>
+        <a:gradFill rotWithShape="1">
+          <a:gsLst>
+            <a:gs pos="0">
+              <a:schemeClr val="phClr">
+                <a:lumMod val="110000"/>
+                <a:satMod val="105000"/>
+                <a:tint val="67000"/>
+              </a:schemeClr>
+            </a:gs>
+            <a:gs pos="50000">
+              <a:schemeClr val="phClr">
+                <a:lumMod val="105000"/>
+                <a:satMod val="103000"/>
+                <a:tint val="73000"/>
+              </a:schemeClr>
+            </a:gs>
+            <a:gs pos="100000">
+              <a:schemeClr val="phClr">
+                <a:lumMod val="105000"/>
+                <a:satMod val="109000"/>
+                <a:tint val="81000"/>
+              </a:schemeClr>
+            </a:gs>
+          </a:gsLst>
+          <a:lin ang="5400000" scaled="0"/>
+        </a:gradFill>
+        <a:gradFill rotWithShape="1">
+          <a:gsLst>
+            <a:gs pos="0">
+              <a:schemeClr val="phClr">
+                <a:satMod val="103000"/>
+                <a:lumMod val="102000"/>
+                <a:tint val="94000"/>
+              </a:schemeClr>
+            </a:gs>
+            <a:gs pos="50000">
+              <a:schemeClr val="phClr">
+                <a:satMod val="110000"/>
+                <a:lumMod val="100000"/>
+                <a:shade val="100000"/>
+              </a:schemeClr>
+            </a:gs>
+            <a:gs pos="100000">
+              <a:schemeClr val="phClr">
+                <a:lumMod val="99000"/>
+                <a:satMod val="120000"/>
+                <a:shade val="78000"/>
+              </a:schemeClr>
+            </a:gs>
+          </a:gsLst>
+          <a:lin ang="5400000" scaled="0"/>
+        </a:gradFill>
+      </a:fillStyleLst>
+      <a:lnStyleLst>
+        <a:ln w="12700" cap="flat" cmpd="sng" algn="ctr">
+          <a:solidFill>
+            <a:schemeClr val="phClr"/>
+          </a:solidFill>
+          <a:prstDash val="solid"/>
+          <a:miter lim="800000"/>
+        </a:ln>
+        <a:ln w="19050" cap="flat" cmpd="sng" algn="ctr">
+          <a:solidFill>
+            <a:schemeClr val="phClr"/>
+          </a:solidFill>
+          <a:prstDash val="solid"/>
+          <a:miter lim="800000"/>
+        </a:ln>
+        <a:ln w="25400" cap="flat" cmpd="sng" algn="ctr">
+          <a:solidFill>
+            <a:schemeClr val="phClr"/>
+          </a:solidFill>
+          <a:prstDash val="solid"/>
+          <a:miter lim="800000"/>
+        </a:ln>
+      </a:lnStyleLst>
+      <a:effectStyleLst>
+        <a:effectStyle>
+          <a:effectLst/>
+        </a:effectStyle>
+        <a:effectStyle>
+          <a:effectLst/>
+        </a:effectStyle>
+        <a:effectStyle>
+          <a:effectLst>
+            <a:outerShdw blurRad="57150" dist="19050" dir="5400000" algn="ctr" rotWithShape="0">
+              <a:srgbClr val="000000">
+                <a:alpha val="63000"/>
+              </a:srgbClr>
+            </a:outerShdw>
+          </a:effectLst>
+        </a:effectStyle>
+      </a:effectStyleLst>
+      <a:bgFillStyleLst>
+        <a:solidFill>
+          <a:schemeClr val="phClr"/>
+        </a:solidFill>
+        <a:solidFill>
+          <a:schemeClr val="phClr">
+            <a:tint val="95000"/>
+            <a:satMod val="170000"/>
+          </a:schemeClr>
+        </a:solidFill>
+        <a:gradFill rotWithShape="1">
+          <a:gsLst>
+            <a:gs pos="0">
+              <a:schemeClr val="phClr">
+                <a:tint val="93000"/>
+                <a:satMod val="150000"/>
+                <a:shade val="98000"/>
+                <a:lumMod val="102000"/>
+              </a:schemeClr>
+            </a:gs>
+            <a:gs pos="50000">
+              <a:schemeClr val="phClr">
+                <a:tint val="98000"/>
+                <a:satMod val="130000"/>
+                <a:shade val="90000"/>
+                <a:lumMod val="103000"/>
+              </a:schemeClr>
+            </a:gs>
+            <a:gs pos="100000">
+              <a:schemeClr val="phClr">
+                <a:shade val="63000"/>
+                <a:satMod val="120000"/>
+              </a:schemeClr>
+            </a:gs>
+          </a:gsLst>
+          <a:lin ang="5400000" scaled="0"/>
+        </a:gradFill>
+      </a:bgFillStyleLst>
+    </a:fmtScheme>
+  </a:themeElements>
+  <a:objectDefaults>
+    <a:lnDef>
+      <a:spPr/>
+      <a:bodyPr/>
+      <a:lstStyle/>
+      <a:style>
+        <a:lnRef idx="2">
+          <a:schemeClr val="accent1"/>
+        </a:lnRef>
+        <a:fillRef idx="0">
+          <a:schemeClr val="accent1"/>
+        </a:fillRef>
+        <a:effectRef idx="1">
+          <a:schemeClr val="accent1"/>
+        </a:effectRef>
+        <a:fontRef idx="minor">
+          <a:schemeClr val="tx1"/>
+        </a:fontRef>
+      </a:style>
+    </a:lnDef>
+  </a:objectDefaults>
+  <a:extraClrSchemeLst/>
+  <a:extLst>
+    <a:ext uri="{05A4C25C-085E-4340-85A3-A5531E510DB2}">
+      <thm15:themeFamily xmlns:thm15="http://schemas.microsoft.com/office/thememl/2012/main" name="Office Theme" id="{2E142A2C-CD16-42D6-873A-C26D2A0506FA}" vid="{1BDDFF52-6CD6-40A5-AB3C-68EB2F1E4D0A}"/>
+    </a:ext>
+  </a:extLst>
+</a:theme>
 </file>